--- a/03-Python程序设计-项目实战/V2授课PPT/W05-第9次课-产线驾驶舱：5个KPI一屏掌.pptx
+++ b/03-Python程序设计-项目实战/V2授课PPT/W05-第9次课-产线驾驶舱：5个KPI一屏掌.pptx
@@ -52,6 +52,9 @@
     <p:sldId id="369" r:id="rId121"/>
     <p:sldId id="337" r:id="rId89"/>
     <p:sldId id="338" r:id="rId90"/>
+    <p:sldId id="370" r:id="rId69"/>
+    <p:sldId id="371" r:id="rId68"/>
+    <p:sldId id="372" r:id="rId67"/>
     <p:sldId id="339" r:id="rId91"/>
     <p:sldId id="340" r:id="rId92"/>
     <p:sldId id="341" r:id="rId93"/>
@@ -8776,7 +8779,7 @@
                 </a:solidFill>
                 <a:latin typeface="微软雅黑"/>
               </a:rPr>
-              <a:t>10 / 62</a:t>
+              <a:t>10 / 65</a:t>
             </a:r>
           </a:p>
         </p:txBody>
@@ -9482,7 +9485,7 @@
                 </a:solidFill>
                 <a:latin typeface="微软雅黑"/>
               </a:rPr>
-              <a:t>11 / 62</a:t>
+              <a:t>11 / 65</a:t>
             </a:r>
           </a:p>
         </p:txBody>
@@ -10188,7 +10191,7 @@
                 </a:solidFill>
                 <a:latin typeface="微软雅黑"/>
               </a:rPr>
-              <a:t>12 / 62</a:t>
+              <a:t>12 / 65</a:t>
             </a:r>
           </a:p>
         </p:txBody>
@@ -10894,7 +10897,7 @@
                 </a:solidFill>
                 <a:latin typeface="微软雅黑"/>
               </a:rPr>
-              <a:t>13 / 62</a:t>
+              <a:t>13 / 65</a:t>
             </a:r>
           </a:p>
         </p:txBody>
@@ -11380,7 +11383,7 @@
                 </a:solidFill>
                 <a:latin typeface="微软雅黑"/>
               </a:rPr>
-              <a:t>14 / 62</a:t>
+              <a:t>14 / 65</a:t>
             </a:r>
           </a:p>
         </p:txBody>
@@ -12323,7 +12326,7 @@
                 </a:solidFill>
                 <a:latin typeface="微软雅黑"/>
               </a:rPr>
-              <a:t>15 / 62</a:t>
+              <a:t>15 / 65</a:t>
             </a:r>
           </a:p>
         </p:txBody>
@@ -13029,7 +13032,7 @@
                 </a:solidFill>
                 <a:latin typeface="微软雅黑"/>
               </a:rPr>
-              <a:t>16 / 62</a:t>
+              <a:t>16 / 65</a:t>
             </a:r>
           </a:p>
         </p:txBody>
@@ -13503,7 +13506,7 @@
                 </a:solidFill>
                 <a:latin typeface="微软雅黑"/>
               </a:rPr>
-              <a:t>17 / 62</a:t>
+              <a:t>17 / 65</a:t>
             </a:r>
           </a:p>
         </p:txBody>
@@ -14209,7 +14212,7 @@
                 </a:solidFill>
                 <a:latin typeface="微软雅黑"/>
               </a:rPr>
-              <a:t>18 / 62</a:t>
+              <a:t>18 / 65</a:t>
             </a:r>
           </a:p>
         </p:txBody>
@@ -15181,7 +15184,7 @@
                 </a:solidFill>
                 <a:latin typeface="微软雅黑"/>
               </a:rPr>
-              <a:t>19 / 62</a:t>
+              <a:t>19 / 65</a:t>
             </a:r>
           </a:p>
         </p:txBody>
@@ -16909,7 +16912,7 @@
                 </a:solidFill>
                 <a:latin typeface="微软雅黑"/>
               </a:rPr>
-              <a:t>2 / 62</a:t>
+              <a:t>2 / 65</a:t>
             </a:r>
           </a:p>
         </p:txBody>
@@ -17764,7 +17767,7 @@
                 </a:solidFill>
                 <a:latin typeface="微软雅黑"/>
               </a:rPr>
-              <a:t>20 / 62</a:t>
+              <a:t>20 / 65</a:t>
             </a:r>
           </a:p>
         </p:txBody>
@@ -18734,7 +18737,7 @@
                 </a:solidFill>
                 <a:latin typeface="微软雅黑"/>
               </a:rPr>
-              <a:t>21 / 62</a:t>
+              <a:t>21 / 65</a:t>
             </a:r>
           </a:p>
         </p:txBody>
@@ -19270,7 +19273,7 @@
                 </a:solidFill>
                 <a:latin typeface="微软雅黑"/>
               </a:rPr>
-              <a:t>22 / 62</a:t>
+              <a:t>22 / 65</a:t>
             </a:r>
           </a:p>
         </p:txBody>
@@ -20240,7 +20243,7 @@
                 </a:solidFill>
                 <a:latin typeface="微软雅黑"/>
               </a:rPr>
-              <a:t>23 / 62</a:t>
+              <a:t>23 / 65</a:t>
             </a:r>
           </a:p>
         </p:txBody>
@@ -21210,7 +21213,7 @@
                 </a:solidFill>
                 <a:latin typeface="微软雅黑"/>
               </a:rPr>
-              <a:t>24 / 62</a:t>
+              <a:t>24 / 65</a:t>
             </a:r>
           </a:p>
         </p:txBody>
@@ -22180,7 +22183,7 @@
                 </a:solidFill>
                 <a:latin typeface="微软雅黑"/>
               </a:rPr>
-              <a:t>25 / 62</a:t>
+              <a:t>25 / 65</a:t>
             </a:r>
           </a:p>
         </p:txBody>
@@ -23150,7 +23153,7 @@
                 </a:solidFill>
                 <a:latin typeface="微软雅黑"/>
               </a:rPr>
-              <a:t>26 / 62</a:t>
+              <a:t>26 / 65</a:t>
             </a:r>
           </a:p>
         </p:txBody>
@@ -24120,7 +24123,7 @@
                 </a:solidFill>
                 <a:latin typeface="微软雅黑"/>
               </a:rPr>
-              <a:t>27 / 62</a:t>
+              <a:t>27 / 65</a:t>
             </a:r>
           </a:p>
         </p:txBody>
@@ -25092,7 +25095,7 @@
                 </a:solidFill>
                 <a:latin typeface="微软雅黑"/>
               </a:rPr>
-              <a:t>28 / 62</a:t>
+              <a:t>28 / 65</a:t>
             </a:r>
           </a:p>
         </p:txBody>
@@ -25712,7 +25715,7 @@
                 </a:solidFill>
                 <a:latin typeface="微软雅黑"/>
               </a:rPr>
-              <a:t>29 / 62</a:t>
+              <a:t>29 / 65</a:t>
             </a:r>
           </a:p>
         </p:txBody>
@@ -26567,7 +26570,7 @@
                 </a:solidFill>
                 <a:latin typeface="微软雅黑"/>
               </a:rPr>
-              <a:t>3 / 62</a:t>
+              <a:t>3 / 65</a:t>
             </a:r>
           </a:p>
         </p:txBody>
@@ -27030,7 +27033,7 @@
                 </a:solidFill>
                 <a:latin typeface="微软雅黑"/>
               </a:rPr>
-              <a:t>30 / 62</a:t>
+              <a:t>30 / 65</a:t>
             </a:r>
           </a:p>
         </p:txBody>
@@ -27474,7 +27477,7 @@
                 </a:solidFill>
                 <a:latin typeface="微软雅黑"/>
               </a:rPr>
-              <a:t>31 / 62</a:t>
+              <a:t>31 / 65</a:t>
             </a:r>
           </a:p>
         </p:txBody>
@@ -28329,7 +28332,7 @@
                 </a:solidFill>
                 <a:latin typeface="微软雅黑"/>
               </a:rPr>
-              <a:t>32 / 62</a:t>
+              <a:t>32 / 65</a:t>
             </a:r>
           </a:p>
         </p:txBody>
@@ -30047,7 +30050,7 @@
                 </a:solidFill>
                 <a:latin typeface="微软雅黑"/>
               </a:rPr>
-              <a:t>33 / 62</a:t>
+              <a:t>33 / 65</a:t>
             </a:r>
           </a:p>
         </p:txBody>
@@ -30839,7 +30842,7 @@
                 </a:solidFill>
                 <a:latin typeface="微软雅黑"/>
               </a:rPr>
-              <a:t>34 / 62</a:t>
+              <a:t>34 / 65</a:t>
             </a:r>
           </a:p>
         </p:txBody>
@@ -31472,7 +31475,7 @@
                 </a:solidFill>
                 <a:latin typeface="微软雅黑"/>
               </a:rPr>
-              <a:t>35 / 62</a:t>
+              <a:t>35 / 65</a:t>
             </a:r>
           </a:p>
         </p:txBody>
@@ -32392,7 +32395,7 @@
                 </a:solidFill>
                 <a:latin typeface="微软雅黑"/>
               </a:rPr>
-              <a:t>36 / 62</a:t>
+              <a:t>36 / 65</a:t>
             </a:r>
           </a:p>
         </p:txBody>
@@ -33312,7 +33315,7 @@
                 </a:solidFill>
                 <a:latin typeface="微软雅黑"/>
               </a:rPr>
-              <a:t>37 / 62</a:t>
+              <a:t>37 / 65</a:t>
             </a:r>
           </a:p>
         </p:txBody>
@@ -34232,7 +34235,7 @@
                 </a:solidFill>
                 <a:latin typeface="微软雅黑"/>
               </a:rPr>
-              <a:t>38 / 62</a:t>
+              <a:t>38 / 65</a:t>
             </a:r>
           </a:p>
         </p:txBody>
@@ -35171,7 +35174,7 @@
                 </a:solidFill>
                 <a:latin typeface="微软雅黑"/>
               </a:rPr>
-              <a:t>39 / 62</a:t>
+              <a:t>39 / 65</a:t>
             </a:r>
           </a:p>
         </p:txBody>
@@ -36143,7 +36146,7 @@
                 </a:solidFill>
                 <a:latin typeface="微软雅黑"/>
               </a:rPr>
-              <a:t>4 / 62</a:t>
+              <a:t>4 / 65</a:t>
             </a:r>
           </a:p>
         </p:txBody>
@@ -37059,7 +37062,7 @@
                 </a:solidFill>
                 <a:latin typeface="微软雅黑"/>
               </a:rPr>
-              <a:t>40 / 62</a:t>
+              <a:t>40 / 65</a:t>
             </a:r>
           </a:p>
         </p:txBody>
@@ -37983,7 +37986,7 @@
                 </a:solidFill>
                 <a:latin typeface="微软雅黑"/>
               </a:rPr>
-              <a:t>41 / 62</a:t>
+              <a:t>41 / 65</a:t>
             </a:r>
           </a:p>
         </p:txBody>
@@ -38775,7 +38778,7 @@
                 </a:solidFill>
                 <a:latin typeface="微软雅黑"/>
               </a:rPr>
-              <a:t>42 / 62</a:t>
+              <a:t>42 / 65</a:t>
             </a:r>
           </a:p>
         </p:txBody>
@@ -39481,7 +39484,7 @@
                 </a:solidFill>
                 <a:latin typeface="微软雅黑"/>
               </a:rPr>
-              <a:t>43 / 62</a:t>
+              <a:t>43 / 65</a:t>
             </a:r>
           </a:p>
         </p:txBody>
@@ -40273,7 +40276,7 @@
                 </a:solidFill>
                 <a:latin typeface="微软雅黑"/>
               </a:rPr>
-              <a:t>44 / 62</a:t>
+              <a:t>44 / 65</a:t>
             </a:r>
           </a:p>
         </p:txBody>
@@ -42324,7 +42327,7 @@
                 </a:solidFill>
                 <a:latin typeface="微软雅黑"/>
               </a:rPr>
-              <a:t>46 / 62</a:t>
+              <a:t>46 / 65</a:t>
             </a:r>
           </a:p>
         </p:txBody>
@@ -43032,7 +43035,7 @@
                 </a:solidFill>
                 <a:latin typeface="微软雅黑"/>
               </a:rPr>
-              <a:t>47 / 62</a:t>
+              <a:t>47 / 65</a:t>
             </a:r>
           </a:p>
         </p:txBody>
@@ -43672,7 +43675,7 @@
                 </a:solidFill>
                 <a:latin typeface="微软雅黑"/>
               </a:rPr>
-              <a:t>48 / 62</a:t>
+              <a:t>51 / 65</a:t>
             </a:r>
           </a:p>
         </p:txBody>
@@ -44257,7 +44260,7 @@
                 </a:solidFill>
                 <a:latin typeface="微软雅黑"/>
               </a:rPr>
-              <a:t>49 / 62</a:t>
+              <a:t>52 / 65</a:t>
             </a:r>
           </a:p>
         </p:txBody>
@@ -45725,7 +45728,7 @@
                 </a:solidFill>
                 <a:latin typeface="微软雅黑"/>
               </a:rPr>
-              <a:t>5 / 62</a:t>
+              <a:t>5 / 65</a:t>
             </a:r>
           </a:p>
         </p:txBody>
@@ -46517,7 +46520,7 @@
                 </a:solidFill>
                 <a:latin typeface="微软雅黑"/>
               </a:rPr>
-              <a:t>50 / 62</a:t>
+              <a:t>53 / 65</a:t>
             </a:r>
           </a:p>
         </p:txBody>
@@ -48149,7 +48152,7 @@
                 </a:solidFill>
                 <a:latin typeface="微软雅黑"/>
               </a:rPr>
-              <a:t>51 / 62</a:t>
+              <a:t>54 / 65</a:t>
             </a:r>
           </a:p>
         </p:txBody>
@@ -48947,7 +48950,7 @@
                 </a:solidFill>
                 <a:latin typeface="微软雅黑"/>
               </a:rPr>
-              <a:t>52 / 62</a:t>
+              <a:t>55 / 65</a:t>
             </a:r>
           </a:p>
         </p:txBody>
@@ -50093,7 +50096,7 @@
                 </a:solidFill>
                 <a:latin typeface="微软雅黑"/>
               </a:rPr>
-              <a:t>53 / 62</a:t>
+              <a:t>56 / 65</a:t>
             </a:r>
           </a:p>
         </p:txBody>
@@ -50946,7 +50949,7 @@
                 </a:solidFill>
                 <a:latin typeface="微软雅黑"/>
               </a:rPr>
-              <a:t>54 / 62</a:t>
+              <a:t>57 / 65</a:t>
             </a:r>
           </a:p>
         </p:txBody>
@@ -51918,7 +51921,7 @@
                 </a:solidFill>
                 <a:latin typeface="微软雅黑"/>
               </a:rPr>
-              <a:t>55 / 62</a:t>
+              <a:t>58 / 65</a:t>
             </a:r>
           </a:p>
         </p:txBody>
@@ -52890,7 +52893,7 @@
                 </a:solidFill>
                 <a:latin typeface="微软雅黑"/>
               </a:rPr>
-              <a:t>56 / 62</a:t>
+              <a:t>59 / 65</a:t>
             </a:r>
           </a:p>
         </p:txBody>
@@ -54149,7 +54152,7 @@
                 </a:solidFill>
                 <a:latin typeface="微软雅黑"/>
               </a:rPr>
-              <a:t>57 / 62</a:t>
+              <a:t>60 / 65</a:t>
             </a:r>
           </a:p>
         </p:txBody>
@@ -55121,7 +55124,7 @@
                 </a:solidFill>
                 <a:latin typeface="微软雅黑"/>
               </a:rPr>
-              <a:t>58 / 62</a:t>
+              <a:t>61 / 65</a:t>
             </a:r>
           </a:p>
         </p:txBody>
@@ -56093,7 +56096,7 @@
                 </a:solidFill>
                 <a:latin typeface="微软雅黑"/>
               </a:rPr>
-              <a:t>59 / 62</a:t>
+              <a:t>62 / 65</a:t>
             </a:r>
           </a:p>
         </p:txBody>
@@ -56799,7 +56802,7 @@
                 </a:solidFill>
                 <a:latin typeface="微软雅黑"/>
               </a:rPr>
-              <a:t>6 / 62</a:t>
+              <a:t>6 / 65</a:t>
             </a:r>
           </a:p>
         </p:txBody>
@@ -57591,7 +57594,7 @@
                 </a:solidFill>
                 <a:latin typeface="微软雅黑"/>
               </a:rPr>
-              <a:t>60 / 62</a:t>
+              <a:t>63 / 65</a:t>
             </a:r>
           </a:p>
         </p:txBody>
@@ -57951,7 +57954,7 @@
                 </a:solidFill>
                 <a:latin typeface="微软雅黑"/>
               </a:rPr>
-              <a:t>61 / 62</a:t>
+              <a:t>64 / 65</a:t>
             </a:r>
           </a:p>
         </p:txBody>
@@ -58322,6 +58325,3118 @@
 </p:sld>
 </file>
 
+<file path=ppt/slides/slide63.xml><?xml version="1.0" encoding="utf-8"?>
+<p:sld xmlns:a="http://schemas.openxmlformats.org/drawingml/2006/main" xmlns:p="http://schemas.openxmlformats.org/presentationml/2006/main" xmlns:r="http://schemas.openxmlformats.org/officeDocument/2006/relationships">
+  <p:cSld>
+    <p:spTree>
+      <p:nvGrpSpPr>
+        <p:cNvPr id="1" name=""/>
+        <p:cNvGrpSpPr/>
+        <p:nvPr/>
+      </p:nvGrpSpPr>
+      <p:grpSpPr/>
+      <p:sp>
+        <p:nvSpPr>
+          <p:cNvPr id="2" name="Rounded Rectangle 1"/>
+          <p:cNvSpPr/>
+          <p:nvPr/>
+        </p:nvSpPr>
+        <p:spPr>
+          <a:xfrm>
+            <a:off x="0" y="0"/>
+            <a:ext cx="12191695" cy="64008"/>
+          </a:xfrm>
+          <a:prstGeom prst="roundRect">
+            <a:avLst>
+              <a:gd name="adj" fmla="val 50000"/>
+            </a:avLst>
+          </a:prstGeom>
+          <a:solidFill>
+            <a:srgbClr val="0B5E54"/>
+          </a:solidFill>
+          <a:ln>
+            <a:noFill/>
+          </a:ln>
+          <a:effectLst/>
+        </p:spPr>
+        <p:style>
+          <a:lnRef idx="1">
+            <a:schemeClr val="accent1"/>
+          </a:lnRef>
+          <a:fillRef idx="3">
+            <a:schemeClr val="accent1"/>
+          </a:fillRef>
+          <a:effectRef idx="2">
+            <a:schemeClr val="accent1"/>
+          </a:effectRef>
+          <a:fontRef idx="minor">
+            <a:schemeClr val="lt1"/>
+          </a:fontRef>
+        </p:style>
+        <p:txBody>
+          <a:bodyPr rtlCol="0" anchor="ctr"/>
+          <a:lstStyle/>
+          <a:p>
+            <a:pPr algn="ctr"/>
+          </a:p>
+        </p:txBody>
+      </p:sp>
+      <p:sp>
+        <p:nvSpPr>
+          <p:cNvPr id="3" name="TextBox 2"/>
+          <p:cNvSpPr txBox="1"/>
+          <p:nvPr/>
+        </p:nvSpPr>
+        <p:spPr>
+          <a:xfrm>
+            <a:off x="475488" y="146304"/>
+            <a:ext cx="8229600" cy="292608"/>
+          </a:xfrm>
+          <a:prstGeom prst="rect">
+            <a:avLst/>
+          </a:prstGeom>
+          <a:noFill/>
+        </p:spPr>
+        <p:txBody>
+          <a:bodyPr wrap="square" anchor="t" lIns="0" rIns="0" tIns="0" bIns="0">
+            <a:spAutoFit/>
+          </a:bodyPr>
+          <a:lstStyle/>
+          <a:p>
+            <a:pPr algn="l">
+              <a:lnSpc>
+                <a:spcPct val="114000"/>
+              </a:lnSpc>
+            </a:pPr>
+            <a:r>
+              <a:rPr sz="1100" b="1">
+                <a:solidFill>
+                  <a:srgbClr val="0B5E54"/>
+                </a:solidFill>
+              </a:rPr>
+              <a:t>工单实战 · 本次实跑结果</a:t>
+            </a:r>
+          </a:p>
+        </p:txBody>
+      </p:sp>
+      <p:sp>
+        <p:nvSpPr>
+          <p:cNvPr id="4" name="Rounded Rectangle 3"/>
+          <p:cNvSpPr/>
+          <p:nvPr/>
+        </p:nvSpPr>
+        <p:spPr>
+          <a:xfrm>
+            <a:off x="475488" y="475488"/>
+            <a:ext cx="1881187" cy="310896"/>
+          </a:xfrm>
+          <a:prstGeom prst="roundRect">
+            <a:avLst>
+              <a:gd name="adj" fmla="val 50000"/>
+            </a:avLst>
+          </a:prstGeom>
+          <a:solidFill>
+            <a:srgbClr val="C9A227"/>
+          </a:solidFill>
+          <a:ln>
+            <a:noFill/>
+          </a:ln>
+          <a:effectLst/>
+        </p:spPr>
+        <p:style>
+          <a:lnRef idx="1">
+            <a:schemeClr val="accent1"/>
+          </a:lnRef>
+          <a:fillRef idx="3">
+            <a:schemeClr val="accent1"/>
+          </a:fillRef>
+          <a:effectRef idx="2">
+            <a:schemeClr val="accent1"/>
+          </a:effectRef>
+          <a:fontRef idx="minor">
+            <a:schemeClr val="lt1"/>
+          </a:fontRef>
+        </p:style>
+        <p:txBody>
+          <a:bodyPr rtlCol="0" anchor="ctr"/>
+          <a:lstStyle/>
+          <a:p>
+            <a:pPr algn="ctr"/>
+          </a:p>
+        </p:txBody>
+      </p:sp>
+      <p:sp>
+        <p:nvSpPr>
+          <p:cNvPr id="5" name="TextBox 4"/>
+          <p:cNvSpPr txBox="1"/>
+          <p:nvPr/>
+        </p:nvSpPr>
+        <p:spPr>
+          <a:xfrm>
+            <a:off x="475488" y="475488"/>
+            <a:ext cx="1881187" cy="310896"/>
+          </a:xfrm>
+          <a:prstGeom prst="rect">
+            <a:avLst/>
+          </a:prstGeom>
+          <a:noFill/>
+        </p:spPr>
+        <p:txBody>
+          <a:bodyPr wrap="square" anchor="ctr" lIns="0" rIns="0" tIns="0" bIns="0">
+            <a:spAutoFit/>
+          </a:bodyPr>
+          <a:lstStyle/>
+          <a:p>
+            <a:pPr algn="ctr">
+              <a:lnSpc>
+                <a:spcPct val="114000"/>
+              </a:lnSpc>
+            </a:pPr>
+            <a:r>
+              <a:rPr sz="1050" b="1">
+                <a:solidFill>
+                  <a:srgbClr val="FFFFFF"/>
+                </a:solidFill>
+              </a:rPr>
+              <a:t>REAL RUN · 四档逐字实测</a:t>
+            </a:r>
+          </a:p>
+        </p:txBody>
+      </p:sp>
+      <p:sp>
+        <p:nvSpPr>
+          <p:cNvPr id="6" name="TextBox 5"/>
+          <p:cNvSpPr txBox="1"/>
+          <p:nvPr/>
+        </p:nvSpPr>
+        <p:spPr>
+          <a:xfrm>
+            <a:off x="475488" y="859536"/>
+            <a:ext cx="11237976" cy="502920"/>
+          </a:xfrm>
+          <a:prstGeom prst="rect">
+            <a:avLst/>
+          </a:prstGeom>
+          <a:noFill/>
+        </p:spPr>
+        <p:txBody>
+          <a:bodyPr wrap="square" anchor="t" lIns="0" rIns="0" tIns="0" bIns="0">
+            <a:spAutoFit/>
+          </a:bodyPr>
+          <a:lstStyle/>
+          <a:p>
+            <a:pPr algn="l">
+              <a:lnSpc>
+                <a:spcPct val="114000"/>
+              </a:lnSpc>
+            </a:pPr>
+            <a:r>
+              <a:rPr sz="2200" b="1">
+                <a:solidFill>
+                  <a:srgbClr val="1B2B28"/>
+                </a:solidFill>
+              </a:rPr>
+              <a:t>P3.1/P3.2 p33_kpi_cockpit：本次 D/C/B/A 四档实测</a:t>
+            </a:r>
+          </a:p>
+        </p:txBody>
+      </p:sp>
+      <p:sp>
+        <p:nvSpPr>
+          <p:cNvPr id="7" name="Rounded Rectangle 6"/>
+          <p:cNvSpPr/>
+          <p:nvPr/>
+        </p:nvSpPr>
+        <p:spPr>
+          <a:xfrm>
+            <a:off x="475488" y="1389888"/>
+            <a:ext cx="1234440" cy="27432"/>
+          </a:xfrm>
+          <a:prstGeom prst="roundRect">
+            <a:avLst>
+              <a:gd name="adj" fmla="val 50000"/>
+            </a:avLst>
+          </a:prstGeom>
+          <a:solidFill>
+            <a:srgbClr val="C9A227"/>
+          </a:solidFill>
+          <a:ln>
+            <a:noFill/>
+          </a:ln>
+          <a:effectLst/>
+        </p:spPr>
+        <p:style>
+          <a:lnRef idx="1">
+            <a:schemeClr val="accent1"/>
+          </a:lnRef>
+          <a:fillRef idx="3">
+            <a:schemeClr val="accent1"/>
+          </a:fillRef>
+          <a:effectRef idx="2">
+            <a:schemeClr val="accent1"/>
+          </a:effectRef>
+          <a:fontRef idx="minor">
+            <a:schemeClr val="lt1"/>
+          </a:fontRef>
+        </p:style>
+        <p:txBody>
+          <a:bodyPr rtlCol="0" anchor="ctr"/>
+          <a:lstStyle/>
+          <a:p>
+            <a:pPr algn="ctr"/>
+          </a:p>
+        </p:txBody>
+      </p:sp>
+      <p:sp>
+        <p:nvSpPr>
+          <p:cNvPr id="8" name="Rounded Rectangle 7"/>
+          <p:cNvSpPr/>
+          <p:nvPr/>
+        </p:nvSpPr>
+        <p:spPr>
+          <a:xfrm>
+            <a:off x="475488" y="6419088"/>
+            <a:ext cx="11237976" cy="10972"/>
+          </a:xfrm>
+          <a:prstGeom prst="roundRect">
+            <a:avLst>
+              <a:gd name="adj" fmla="val 50000"/>
+            </a:avLst>
+          </a:prstGeom>
+          <a:solidFill>
+            <a:srgbClr val="E4F1EE"/>
+          </a:solidFill>
+          <a:ln>
+            <a:noFill/>
+          </a:ln>
+          <a:effectLst/>
+        </p:spPr>
+        <p:style>
+          <a:lnRef idx="1">
+            <a:schemeClr val="accent1"/>
+          </a:lnRef>
+          <a:fillRef idx="3">
+            <a:schemeClr val="accent1"/>
+          </a:fillRef>
+          <a:effectRef idx="2">
+            <a:schemeClr val="accent1"/>
+          </a:effectRef>
+          <a:fontRef idx="minor">
+            <a:schemeClr val="lt1"/>
+          </a:fontRef>
+        </p:style>
+        <p:txBody>
+          <a:bodyPr rtlCol="0" anchor="ctr"/>
+          <a:lstStyle/>
+          <a:p>
+            <a:pPr algn="ctr"/>
+          </a:p>
+        </p:txBody>
+      </p:sp>
+      <p:sp>
+        <p:nvSpPr>
+          <p:cNvPr id="9" name="TextBox 8"/>
+          <p:cNvSpPr txBox="1"/>
+          <p:nvPr/>
+        </p:nvSpPr>
+        <p:spPr>
+          <a:xfrm>
+            <a:off x="475488" y="6455664"/>
+            <a:ext cx="7315200" cy="292608"/>
+          </a:xfrm>
+          <a:prstGeom prst="rect">
+            <a:avLst/>
+          </a:prstGeom>
+          <a:noFill/>
+        </p:spPr>
+        <p:txBody>
+          <a:bodyPr wrap="square" anchor="t" lIns="0" rIns="0" tIns="0" bIns="0">
+            <a:spAutoFit/>
+          </a:bodyPr>
+          <a:lstStyle/>
+          <a:p>
+            <a:pPr algn="l">
+              <a:lnSpc>
+                <a:spcPct val="114000"/>
+              </a:lnSpc>
+            </a:pPr>
+            <a:r>
+              <a:rPr sz="900" b="0">
+                <a:solidFill>
+                  <a:srgbClr val="5C6E6A"/>
+                </a:solidFill>
+              </a:rPr>
+              <a:t>两江智造集团 · Python程序设计（项目实战）</a:t>
+            </a:r>
+          </a:p>
+        </p:txBody>
+      </p:sp>
+      <p:sp>
+        <p:nvSpPr>
+          <p:cNvPr id="10" name="TextBox 9"/>
+          <p:cNvSpPr txBox="1"/>
+          <p:nvPr/>
+        </p:nvSpPr>
+        <p:spPr>
+          <a:xfrm>
+            <a:off x="10597896" y="6537960"/>
+            <a:ext cx="996696" cy="301752"/>
+          </a:xfrm>
+          <a:prstGeom prst="rect">
+            <a:avLst/>
+          </a:prstGeom>
+          <a:noFill/>
+        </p:spPr>
+        <p:txBody>
+          <a:bodyPr wrap="square" anchor="t" lIns="0" rIns="0" tIns="0" bIns="0">
+            <a:spAutoFit/>
+          </a:bodyPr>
+          <a:lstStyle/>
+          <a:p>
+            <a:pPr algn="r">
+              <a:lnSpc>
+                <a:spcPct val="114000"/>
+              </a:lnSpc>
+            </a:pPr>
+            <a:r>
+              <a:rPr sz="1000" b="0">
+                <a:solidFill>
+                  <a:srgbClr val="8A97B5"/>
+                </a:solidFill>
+              </a:rPr>
+              <a:t>48 / 65</a:t>
+            </a:r>
+          </a:p>
+        </p:txBody>
+      </p:sp>
+      <p:sp>
+        <p:nvSpPr>
+          <p:cNvPr id="11" name="Rounded Rectangle 10"/>
+          <p:cNvSpPr/>
+          <p:nvPr/>
+        </p:nvSpPr>
+        <p:spPr>
+          <a:xfrm>
+            <a:off x="475488" y="1554480"/>
+            <a:ext cx="11237976" cy="825497"/>
+          </a:xfrm>
+          <a:prstGeom prst="roundRect">
+            <a:avLst>
+              <a:gd name="adj" fmla="val 6000"/>
+            </a:avLst>
+          </a:prstGeom>
+          <a:solidFill>
+            <a:srgbClr val="FFFFFF"/>
+          </a:solidFill>
+          <a:ln w="9525">
+            <a:solidFill>
+              <a:srgbClr val="E4F1EE"/>
+            </a:solidFill>
+          </a:ln>
+          <a:effectLst/>
+        </p:spPr>
+        <p:style>
+          <a:lnRef idx="1">
+            <a:schemeClr val="accent1"/>
+          </a:lnRef>
+          <a:fillRef idx="3">
+            <a:schemeClr val="accent1"/>
+          </a:fillRef>
+          <a:effectRef idx="2">
+            <a:schemeClr val="accent1"/>
+          </a:effectRef>
+          <a:fontRef idx="minor">
+            <a:schemeClr val="lt1"/>
+          </a:fontRef>
+        </p:style>
+        <p:txBody>
+          <a:bodyPr rtlCol="0" anchor="ctr"/>
+          <a:lstStyle/>
+          <a:p>
+            <a:pPr algn="ctr"/>
+          </a:p>
+        </p:txBody>
+      </p:sp>
+      <p:sp>
+        <p:nvSpPr>
+          <p:cNvPr id="12" name="Rounded Rectangle 11"/>
+          <p:cNvSpPr/>
+          <p:nvPr/>
+        </p:nvSpPr>
+        <p:spPr>
+          <a:xfrm>
+            <a:off x="475488" y="1554480"/>
+            <a:ext cx="54864" cy="825497"/>
+          </a:xfrm>
+          <a:prstGeom prst="roundRect">
+            <a:avLst>
+              <a:gd name="adj" fmla="val 50000"/>
+            </a:avLst>
+          </a:prstGeom>
+          <a:solidFill>
+            <a:srgbClr val="5C6E6A"/>
+          </a:solidFill>
+          <a:ln>
+            <a:noFill/>
+          </a:ln>
+          <a:effectLst/>
+        </p:spPr>
+        <p:style>
+          <a:lnRef idx="1">
+            <a:schemeClr val="accent1"/>
+          </a:lnRef>
+          <a:fillRef idx="3">
+            <a:schemeClr val="accent1"/>
+          </a:fillRef>
+          <a:effectRef idx="2">
+            <a:schemeClr val="accent1"/>
+          </a:effectRef>
+          <a:fontRef idx="minor">
+            <a:schemeClr val="lt1"/>
+          </a:fontRef>
+        </p:style>
+        <p:txBody>
+          <a:bodyPr rtlCol="0" anchor="ctr"/>
+          <a:lstStyle/>
+          <a:p>
+            <a:pPr algn="ctr"/>
+          </a:p>
+        </p:txBody>
+      </p:sp>
+      <p:sp>
+        <p:nvSpPr>
+          <p:cNvPr id="13" name="Rounded Rectangle 12"/>
+          <p:cNvSpPr/>
+          <p:nvPr/>
+        </p:nvSpPr>
+        <p:spPr>
+          <a:xfrm>
+            <a:off x="621792" y="1636776"/>
+            <a:ext cx="237744" cy="237744"/>
+          </a:xfrm>
+          <a:prstGeom prst="roundRect">
+            <a:avLst>
+              <a:gd name="adj" fmla="val 28000"/>
+            </a:avLst>
+          </a:prstGeom>
+          <a:solidFill>
+            <a:srgbClr val="5C6E6A"/>
+          </a:solidFill>
+          <a:ln>
+            <a:noFill/>
+          </a:ln>
+          <a:effectLst/>
+        </p:spPr>
+        <p:style>
+          <a:lnRef idx="1">
+            <a:schemeClr val="accent1"/>
+          </a:lnRef>
+          <a:fillRef idx="3">
+            <a:schemeClr val="accent1"/>
+          </a:fillRef>
+          <a:effectRef idx="2">
+            <a:schemeClr val="accent1"/>
+          </a:effectRef>
+          <a:fontRef idx="minor">
+            <a:schemeClr val="lt1"/>
+          </a:fontRef>
+        </p:style>
+        <p:txBody>
+          <a:bodyPr rtlCol="0" anchor="ctr"/>
+          <a:lstStyle/>
+          <a:p>
+            <a:pPr algn="ctr"/>
+          </a:p>
+        </p:txBody>
+      </p:sp>
+      <p:sp>
+        <p:nvSpPr>
+          <p:cNvPr id="14" name="TextBox 13"/>
+          <p:cNvSpPr txBox="1"/>
+          <p:nvPr/>
+        </p:nvSpPr>
+        <p:spPr>
+          <a:xfrm>
+            <a:off x="621792" y="1636776"/>
+            <a:ext cx="237744" cy="237744"/>
+          </a:xfrm>
+          <a:prstGeom prst="rect">
+            <a:avLst/>
+          </a:prstGeom>
+          <a:noFill/>
+        </p:spPr>
+        <p:txBody>
+          <a:bodyPr wrap="square" anchor="ctr" lIns="0" rIns="0" tIns="0" bIns="0">
+            <a:spAutoFit/>
+          </a:bodyPr>
+          <a:lstStyle/>
+          <a:p>
+            <a:pPr algn="ctr">
+              <a:lnSpc>
+                <a:spcPct val="114000"/>
+              </a:lnSpc>
+            </a:pPr>
+            <a:r>
+              <a:rPr sz="1000" b="1">
+                <a:solidFill>
+                  <a:srgbClr val="FFFFFF"/>
+                </a:solidFill>
+              </a:rPr>
+              <a:t>D</a:t>
+            </a:r>
+          </a:p>
+        </p:txBody>
+      </p:sp>
+      <p:sp>
+        <p:nvSpPr>
+          <p:cNvPr id="15" name="TextBox 14"/>
+          <p:cNvSpPr txBox="1"/>
+          <p:nvPr/>
+        </p:nvSpPr>
+        <p:spPr>
+          <a:xfrm>
+            <a:off x="932688" y="1618488"/>
+            <a:ext cx="8778240" cy="274320"/>
+          </a:xfrm>
+          <a:prstGeom prst="rect">
+            <a:avLst/>
+          </a:prstGeom>
+          <a:noFill/>
+        </p:spPr>
+        <p:txBody>
+          <a:bodyPr wrap="square" anchor="ctr" lIns="0" rIns="0" tIns="0" bIns="0">
+            <a:spAutoFit/>
+          </a:bodyPr>
+          <a:lstStyle/>
+          <a:p>
+            <a:pPr algn="l">
+              <a:lnSpc>
+                <a:spcPct val="114000"/>
+              </a:lnSpc>
+            </a:pPr>
+            <a:r>
+              <a:rPr sz="1050" b="1">
+                <a:solidFill>
+                  <a:srgbClr val="1B2B28"/>
+                </a:solidFill>
+              </a:rPr>
+              <a:t>及格</a:t>
+            </a:r>
+            <a:r>
+              <a:rPr sz="850" b="0">
+                <a:solidFill>
+                  <a:srgbClr val="5C6E6A"/>
+                </a:solidFill>
+              </a:rPr>
+              <a:t>   验收口径：</a:t>
+            </a:r>
+            <a:r>
+              <a:rPr sz="850" b="0">
+                <a:solidFill>
+                  <a:srgbClr val="5C6E6A"/>
+                </a:solidFill>
+              </a:rPr>
+              <a:t>KPI可用+时间筛选；日报四部分完整+PDF正确</a:t>
+            </a:r>
+          </a:p>
+        </p:txBody>
+      </p:sp>
+      <p:sp>
+        <p:nvSpPr>
+          <p:cNvPr id="16" name="Rounded Rectangle 15"/>
+          <p:cNvSpPr/>
+          <p:nvPr/>
+        </p:nvSpPr>
+        <p:spPr>
+          <a:xfrm>
+            <a:off x="11131803" y="1645920"/>
+            <a:ext cx="453644" cy="237744"/>
+          </a:xfrm>
+          <a:prstGeom prst="roundRect">
+            <a:avLst>
+              <a:gd name="adj" fmla="val 50000"/>
+            </a:avLst>
+          </a:prstGeom>
+          <a:solidFill>
+            <a:srgbClr val="0B5E54"/>
+          </a:solidFill>
+          <a:ln>
+            <a:noFill/>
+          </a:ln>
+          <a:effectLst/>
+        </p:spPr>
+        <p:style>
+          <a:lnRef idx="1">
+            <a:schemeClr val="accent1"/>
+          </a:lnRef>
+          <a:fillRef idx="3">
+            <a:schemeClr val="accent1"/>
+          </a:fillRef>
+          <a:effectRef idx="2">
+            <a:schemeClr val="accent1"/>
+          </a:effectRef>
+          <a:fontRef idx="minor">
+            <a:schemeClr val="lt1"/>
+          </a:fontRef>
+        </p:style>
+        <p:txBody>
+          <a:bodyPr rtlCol="0" anchor="ctr"/>
+          <a:lstStyle/>
+          <a:p>
+            <a:pPr algn="ctr"/>
+          </a:p>
+        </p:txBody>
+      </p:sp>
+      <p:sp>
+        <p:nvSpPr>
+          <p:cNvPr id="17" name="TextBox 16"/>
+          <p:cNvSpPr txBox="1"/>
+          <p:nvPr/>
+        </p:nvSpPr>
+        <p:spPr>
+          <a:xfrm>
+            <a:off x="11131803" y="1645920"/>
+            <a:ext cx="453644" cy="237744"/>
+          </a:xfrm>
+          <a:prstGeom prst="rect">
+            <a:avLst/>
+          </a:prstGeom>
+          <a:noFill/>
+        </p:spPr>
+        <p:txBody>
+          <a:bodyPr wrap="square" anchor="ctr" lIns="0" rIns="0" tIns="0" bIns="0">
+            <a:spAutoFit/>
+          </a:bodyPr>
+          <a:lstStyle/>
+          <a:p>
+            <a:pPr algn="ctr">
+              <a:lnSpc>
+                <a:spcPct val="114000"/>
+              </a:lnSpc>
+            </a:pPr>
+            <a:r>
+              <a:rPr sz="850" b="1">
+                <a:solidFill>
+                  <a:srgbClr val="FFFFFF"/>
+                </a:solidFill>
+              </a:rPr>
+              <a:t>达标</a:t>
+            </a:r>
+          </a:p>
+        </p:txBody>
+      </p:sp>
+      <p:sp>
+        <p:nvSpPr>
+          <p:cNvPr id="18" name="TextBox 17"/>
+          <p:cNvSpPr txBox="1"/>
+          <p:nvPr/>
+        </p:nvSpPr>
+        <p:spPr>
+          <a:xfrm>
+            <a:off x="932688" y="1901952"/>
+            <a:ext cx="10671047" cy="423161"/>
+          </a:xfrm>
+          <a:prstGeom prst="rect">
+            <a:avLst/>
+          </a:prstGeom>
+          <a:noFill/>
+        </p:spPr>
+        <p:txBody>
+          <a:bodyPr wrap="square" anchor="t" lIns="0" rIns="0" tIns="0" bIns="0">
+            <a:spAutoFit/>
+          </a:bodyPr>
+          <a:lstStyle/>
+          <a:p>
+            <a:pPr algn="l">
+              <a:lnSpc>
+                <a:spcPct val="114000"/>
+              </a:lnSpc>
+            </a:pPr>
+            <a:r>
+              <a:rPr sz="950" b="0">
+                <a:solidFill>
+                  <a:srgbClr val="1B2B28"/>
+                </a:solidFill>
+              </a:rPr>
+              <a:t>必做 KPI 5/5 全有值；时间筛选：同一 core.filter_records 缩到单日 2026-03-01 命中 47 行（全量 1186）；四段 生产概览 / 详细分析 / 异常识别 / 数据附表 全部见于 daily_report.html；PDF daily_report.pdf 校验通过：42190 B / 4 页，%PDF- 头与 %%EOF 尾齐</a:t>
+            </a:r>
+          </a:p>
+        </p:txBody>
+      </p:sp>
+      <p:sp>
+        <p:nvSpPr>
+          <p:cNvPr id="19" name="Rounded Rectangle 18"/>
+          <p:cNvSpPr/>
+          <p:nvPr/>
+        </p:nvSpPr>
+        <p:spPr>
+          <a:xfrm>
+            <a:off x="475488" y="2443985"/>
+            <a:ext cx="11237976" cy="1007874"/>
+          </a:xfrm>
+          <a:prstGeom prst="roundRect">
+            <a:avLst>
+              <a:gd name="adj" fmla="val 6000"/>
+            </a:avLst>
+          </a:prstGeom>
+          <a:solidFill>
+            <a:srgbClr val="FFFFFF"/>
+          </a:solidFill>
+          <a:ln w="9525">
+            <a:solidFill>
+              <a:srgbClr val="E4F1EE"/>
+            </a:solidFill>
+          </a:ln>
+          <a:effectLst/>
+        </p:spPr>
+        <p:style>
+          <a:lnRef idx="1">
+            <a:schemeClr val="accent1"/>
+          </a:lnRef>
+          <a:fillRef idx="3">
+            <a:schemeClr val="accent1"/>
+          </a:fillRef>
+          <a:effectRef idx="2">
+            <a:schemeClr val="accent1"/>
+          </a:effectRef>
+          <a:fontRef idx="minor">
+            <a:schemeClr val="lt1"/>
+          </a:fontRef>
+        </p:style>
+        <p:txBody>
+          <a:bodyPr rtlCol="0" anchor="ctr"/>
+          <a:lstStyle/>
+          <a:p>
+            <a:pPr algn="ctr"/>
+          </a:p>
+        </p:txBody>
+      </p:sp>
+      <p:sp>
+        <p:nvSpPr>
+          <p:cNvPr id="20" name="Rounded Rectangle 19"/>
+          <p:cNvSpPr/>
+          <p:nvPr/>
+        </p:nvSpPr>
+        <p:spPr>
+          <a:xfrm>
+            <a:off x="475488" y="2443985"/>
+            <a:ext cx="54864" cy="1007874"/>
+          </a:xfrm>
+          <a:prstGeom prst="roundRect">
+            <a:avLst>
+              <a:gd name="adj" fmla="val 50000"/>
+            </a:avLst>
+          </a:prstGeom>
+          <a:solidFill>
+            <a:srgbClr val="157A6D"/>
+          </a:solidFill>
+          <a:ln>
+            <a:noFill/>
+          </a:ln>
+          <a:effectLst/>
+        </p:spPr>
+        <p:style>
+          <a:lnRef idx="1">
+            <a:schemeClr val="accent1"/>
+          </a:lnRef>
+          <a:fillRef idx="3">
+            <a:schemeClr val="accent1"/>
+          </a:fillRef>
+          <a:effectRef idx="2">
+            <a:schemeClr val="accent1"/>
+          </a:effectRef>
+          <a:fontRef idx="minor">
+            <a:schemeClr val="lt1"/>
+          </a:fontRef>
+        </p:style>
+        <p:txBody>
+          <a:bodyPr rtlCol="0" anchor="ctr"/>
+          <a:lstStyle/>
+          <a:p>
+            <a:pPr algn="ctr"/>
+          </a:p>
+        </p:txBody>
+      </p:sp>
+      <p:sp>
+        <p:nvSpPr>
+          <p:cNvPr id="21" name="Rounded Rectangle 20"/>
+          <p:cNvSpPr/>
+          <p:nvPr/>
+        </p:nvSpPr>
+        <p:spPr>
+          <a:xfrm>
+            <a:off x="621792" y="2526281"/>
+            <a:ext cx="237744" cy="237744"/>
+          </a:xfrm>
+          <a:prstGeom prst="roundRect">
+            <a:avLst>
+              <a:gd name="adj" fmla="val 28000"/>
+            </a:avLst>
+          </a:prstGeom>
+          <a:solidFill>
+            <a:srgbClr val="157A6D"/>
+          </a:solidFill>
+          <a:ln>
+            <a:noFill/>
+          </a:ln>
+          <a:effectLst/>
+        </p:spPr>
+        <p:style>
+          <a:lnRef idx="1">
+            <a:schemeClr val="accent1"/>
+          </a:lnRef>
+          <a:fillRef idx="3">
+            <a:schemeClr val="accent1"/>
+          </a:fillRef>
+          <a:effectRef idx="2">
+            <a:schemeClr val="accent1"/>
+          </a:effectRef>
+          <a:fontRef idx="minor">
+            <a:schemeClr val="lt1"/>
+          </a:fontRef>
+        </p:style>
+        <p:txBody>
+          <a:bodyPr rtlCol="0" anchor="ctr"/>
+          <a:lstStyle/>
+          <a:p>
+            <a:pPr algn="ctr"/>
+          </a:p>
+        </p:txBody>
+      </p:sp>
+      <p:sp>
+        <p:nvSpPr>
+          <p:cNvPr id="22" name="TextBox 21"/>
+          <p:cNvSpPr txBox="1"/>
+          <p:nvPr/>
+        </p:nvSpPr>
+        <p:spPr>
+          <a:xfrm>
+            <a:off x="621792" y="2526281"/>
+            <a:ext cx="237744" cy="237744"/>
+          </a:xfrm>
+          <a:prstGeom prst="rect">
+            <a:avLst/>
+          </a:prstGeom>
+          <a:noFill/>
+        </p:spPr>
+        <p:txBody>
+          <a:bodyPr wrap="square" anchor="ctr" lIns="0" rIns="0" tIns="0" bIns="0">
+            <a:spAutoFit/>
+          </a:bodyPr>
+          <a:lstStyle/>
+          <a:p>
+            <a:pPr algn="ctr">
+              <a:lnSpc>
+                <a:spcPct val="114000"/>
+              </a:lnSpc>
+            </a:pPr>
+            <a:r>
+              <a:rPr sz="1000" b="1">
+                <a:solidFill>
+                  <a:srgbClr val="FFFFFF"/>
+                </a:solidFill>
+              </a:rPr>
+              <a:t>C</a:t>
+            </a:r>
+          </a:p>
+        </p:txBody>
+      </p:sp>
+      <p:sp>
+        <p:nvSpPr>
+          <p:cNvPr id="23" name="TextBox 22"/>
+          <p:cNvSpPr txBox="1"/>
+          <p:nvPr/>
+        </p:nvSpPr>
+        <p:spPr>
+          <a:xfrm>
+            <a:off x="932688" y="2507993"/>
+            <a:ext cx="8778240" cy="274320"/>
+          </a:xfrm>
+          <a:prstGeom prst="rect">
+            <a:avLst/>
+          </a:prstGeom>
+          <a:noFill/>
+        </p:spPr>
+        <p:txBody>
+          <a:bodyPr wrap="square" anchor="ctr" lIns="0" rIns="0" tIns="0" bIns="0">
+            <a:spAutoFit/>
+          </a:bodyPr>
+          <a:lstStyle/>
+          <a:p>
+            <a:pPr algn="l">
+              <a:lnSpc>
+                <a:spcPct val="114000"/>
+              </a:lnSpc>
+            </a:pPr>
+            <a:r>
+              <a:rPr sz="1050" b="1">
+                <a:solidFill>
+                  <a:srgbClr val="1B2B28"/>
+                </a:solidFill>
+              </a:rPr>
+              <a:t>良好</a:t>
+            </a:r>
+            <a:r>
+              <a:rPr sz="850" b="0">
+                <a:solidFill>
+                  <a:srgbClr val="5C6E6A"/>
+                </a:solidFill>
+              </a:rPr>
+              <a:t>   验收口径：</a:t>
+            </a:r>
+            <a:r>
+              <a:rPr sz="850" b="0">
+                <a:solidFill>
+                  <a:srgbClr val="5C6E6A"/>
+                </a:solidFill>
+              </a:rPr>
+              <a:t>联动筛选流畅；日报生成&lt;2分钟</a:t>
+            </a:r>
+          </a:p>
+        </p:txBody>
+      </p:sp>
+      <p:sp>
+        <p:nvSpPr>
+          <p:cNvPr id="24" name="Rounded Rectangle 23"/>
+          <p:cNvSpPr/>
+          <p:nvPr/>
+        </p:nvSpPr>
+        <p:spPr>
+          <a:xfrm>
+            <a:off x="11131803" y="2535425"/>
+            <a:ext cx="453644" cy="237744"/>
+          </a:xfrm>
+          <a:prstGeom prst="roundRect">
+            <a:avLst>
+              <a:gd name="adj" fmla="val 50000"/>
+            </a:avLst>
+          </a:prstGeom>
+          <a:solidFill>
+            <a:srgbClr val="0B5E54"/>
+          </a:solidFill>
+          <a:ln>
+            <a:noFill/>
+          </a:ln>
+          <a:effectLst/>
+        </p:spPr>
+        <p:style>
+          <a:lnRef idx="1">
+            <a:schemeClr val="accent1"/>
+          </a:lnRef>
+          <a:fillRef idx="3">
+            <a:schemeClr val="accent1"/>
+          </a:fillRef>
+          <a:effectRef idx="2">
+            <a:schemeClr val="accent1"/>
+          </a:effectRef>
+          <a:fontRef idx="minor">
+            <a:schemeClr val="lt1"/>
+          </a:fontRef>
+        </p:style>
+        <p:txBody>
+          <a:bodyPr rtlCol="0" anchor="ctr"/>
+          <a:lstStyle/>
+          <a:p>
+            <a:pPr algn="ctr"/>
+          </a:p>
+        </p:txBody>
+      </p:sp>
+      <p:sp>
+        <p:nvSpPr>
+          <p:cNvPr id="25" name="TextBox 24"/>
+          <p:cNvSpPr txBox="1"/>
+          <p:nvPr/>
+        </p:nvSpPr>
+        <p:spPr>
+          <a:xfrm>
+            <a:off x="11131803" y="2535425"/>
+            <a:ext cx="453644" cy="237744"/>
+          </a:xfrm>
+          <a:prstGeom prst="rect">
+            <a:avLst/>
+          </a:prstGeom>
+          <a:noFill/>
+        </p:spPr>
+        <p:txBody>
+          <a:bodyPr wrap="square" anchor="ctr" lIns="0" rIns="0" tIns="0" bIns="0">
+            <a:spAutoFit/>
+          </a:bodyPr>
+          <a:lstStyle/>
+          <a:p>
+            <a:pPr algn="ctr">
+              <a:lnSpc>
+                <a:spcPct val="114000"/>
+              </a:lnSpc>
+            </a:pPr>
+            <a:r>
+              <a:rPr sz="850" b="1">
+                <a:solidFill>
+                  <a:srgbClr val="FFFFFF"/>
+                </a:solidFill>
+              </a:rPr>
+              <a:t>达标</a:t>
+            </a:r>
+          </a:p>
+        </p:txBody>
+      </p:sp>
+      <p:sp>
+        <p:nvSpPr>
+          <p:cNvPr id="26" name="TextBox 25"/>
+          <p:cNvSpPr txBox="1"/>
+          <p:nvPr/>
+        </p:nvSpPr>
+        <p:spPr>
+          <a:xfrm>
+            <a:off x="932688" y="2791457"/>
+            <a:ext cx="10671047" cy="605538"/>
+          </a:xfrm>
+          <a:prstGeom prst="rect">
+            <a:avLst/>
+          </a:prstGeom>
+          <a:noFill/>
+        </p:spPr>
+        <p:txBody>
+          <a:bodyPr wrap="square" anchor="t" lIns="0" rIns="0" tIns="0" bIns="0">
+            <a:spAutoFit/>
+          </a:bodyPr>
+          <a:lstStyle/>
+          <a:p>
+            <a:pPr algn="l">
+              <a:lnSpc>
+                <a:spcPct val="114000"/>
+              </a:lnSpc>
+            </a:pPr>
+            <a:r>
+              <a:rPr sz="950" b="0">
+                <a:solidFill>
+                  <a:srgbClr val="1B2B28"/>
+                </a:solidFill>
+              </a:rPr>
+              <a:t>联动程序化验证（同一 core.filter_records）：单日命中 47/1186 行；仅选 DEV-01 命中 296 行、总产量 14939＜全量 60273（筛选真的驱动重算）；app.py on_select="rerun" 接线 2 处 → core.drill_rows 联动明细 30 行（回路非空）；AppTest 无头真执行 app.py 并断言切换单日后命中变小（tests/test_dashboard.py，非肉眼验收）；日报耗时档位 &lt;1s（预算 120s，判定行不含毫秒，精确秒数在 timing.txt/runtime/）</a:t>
+            </a:r>
+          </a:p>
+        </p:txBody>
+      </p:sp>
+      <p:sp>
+        <p:nvSpPr>
+          <p:cNvPr id="27" name="Rounded Rectangle 26"/>
+          <p:cNvSpPr/>
+          <p:nvPr/>
+        </p:nvSpPr>
+        <p:spPr>
+          <a:xfrm>
+            <a:off x="475488" y="3515868"/>
+            <a:ext cx="11237976" cy="825497"/>
+          </a:xfrm>
+          <a:prstGeom prst="roundRect">
+            <a:avLst>
+              <a:gd name="adj" fmla="val 6000"/>
+            </a:avLst>
+          </a:prstGeom>
+          <a:solidFill>
+            <a:srgbClr val="FFFFFF"/>
+          </a:solidFill>
+          <a:ln w="9525">
+            <a:solidFill>
+              <a:srgbClr val="E4F1EE"/>
+            </a:solidFill>
+          </a:ln>
+          <a:effectLst/>
+        </p:spPr>
+        <p:style>
+          <a:lnRef idx="1">
+            <a:schemeClr val="accent1"/>
+          </a:lnRef>
+          <a:fillRef idx="3">
+            <a:schemeClr val="accent1"/>
+          </a:fillRef>
+          <a:effectRef idx="2">
+            <a:schemeClr val="accent1"/>
+          </a:effectRef>
+          <a:fontRef idx="minor">
+            <a:schemeClr val="lt1"/>
+          </a:fontRef>
+        </p:style>
+        <p:txBody>
+          <a:bodyPr rtlCol="0" anchor="ctr"/>
+          <a:lstStyle/>
+          <a:p>
+            <a:pPr algn="ctr"/>
+          </a:p>
+        </p:txBody>
+      </p:sp>
+      <p:sp>
+        <p:nvSpPr>
+          <p:cNvPr id="28" name="Rounded Rectangle 27"/>
+          <p:cNvSpPr/>
+          <p:nvPr/>
+        </p:nvSpPr>
+        <p:spPr>
+          <a:xfrm>
+            <a:off x="475488" y="3515868"/>
+            <a:ext cx="54864" cy="825497"/>
+          </a:xfrm>
+          <a:prstGeom prst="roundRect">
+            <a:avLst>
+              <a:gd name="adj" fmla="val 50000"/>
+            </a:avLst>
+          </a:prstGeom>
+          <a:solidFill>
+            <a:srgbClr val="0B5E54"/>
+          </a:solidFill>
+          <a:ln>
+            <a:noFill/>
+          </a:ln>
+          <a:effectLst/>
+        </p:spPr>
+        <p:style>
+          <a:lnRef idx="1">
+            <a:schemeClr val="accent1"/>
+          </a:lnRef>
+          <a:fillRef idx="3">
+            <a:schemeClr val="accent1"/>
+          </a:fillRef>
+          <a:effectRef idx="2">
+            <a:schemeClr val="accent1"/>
+          </a:effectRef>
+          <a:fontRef idx="minor">
+            <a:schemeClr val="lt1"/>
+          </a:fontRef>
+        </p:style>
+        <p:txBody>
+          <a:bodyPr rtlCol="0" anchor="ctr"/>
+          <a:lstStyle/>
+          <a:p>
+            <a:pPr algn="ctr"/>
+          </a:p>
+        </p:txBody>
+      </p:sp>
+      <p:sp>
+        <p:nvSpPr>
+          <p:cNvPr id="29" name="Rounded Rectangle 28"/>
+          <p:cNvSpPr/>
+          <p:nvPr/>
+        </p:nvSpPr>
+        <p:spPr>
+          <a:xfrm>
+            <a:off x="621792" y="3598163"/>
+            <a:ext cx="237744" cy="237744"/>
+          </a:xfrm>
+          <a:prstGeom prst="roundRect">
+            <a:avLst>
+              <a:gd name="adj" fmla="val 28000"/>
+            </a:avLst>
+          </a:prstGeom>
+          <a:solidFill>
+            <a:srgbClr val="0B5E54"/>
+          </a:solidFill>
+          <a:ln>
+            <a:noFill/>
+          </a:ln>
+          <a:effectLst/>
+        </p:spPr>
+        <p:style>
+          <a:lnRef idx="1">
+            <a:schemeClr val="accent1"/>
+          </a:lnRef>
+          <a:fillRef idx="3">
+            <a:schemeClr val="accent1"/>
+          </a:fillRef>
+          <a:effectRef idx="2">
+            <a:schemeClr val="accent1"/>
+          </a:effectRef>
+          <a:fontRef idx="minor">
+            <a:schemeClr val="lt1"/>
+          </a:fontRef>
+        </p:style>
+        <p:txBody>
+          <a:bodyPr rtlCol="0" anchor="ctr"/>
+          <a:lstStyle/>
+          <a:p>
+            <a:pPr algn="ctr"/>
+          </a:p>
+        </p:txBody>
+      </p:sp>
+      <p:sp>
+        <p:nvSpPr>
+          <p:cNvPr id="30" name="TextBox 29"/>
+          <p:cNvSpPr txBox="1"/>
+          <p:nvPr/>
+        </p:nvSpPr>
+        <p:spPr>
+          <a:xfrm>
+            <a:off x="621792" y="3598163"/>
+            <a:ext cx="237744" cy="237744"/>
+          </a:xfrm>
+          <a:prstGeom prst="rect">
+            <a:avLst/>
+          </a:prstGeom>
+          <a:noFill/>
+        </p:spPr>
+        <p:txBody>
+          <a:bodyPr wrap="square" anchor="ctr" lIns="0" rIns="0" tIns="0" bIns="0">
+            <a:spAutoFit/>
+          </a:bodyPr>
+          <a:lstStyle/>
+          <a:p>
+            <a:pPr algn="ctr">
+              <a:lnSpc>
+                <a:spcPct val="114000"/>
+              </a:lnSpc>
+            </a:pPr>
+            <a:r>
+              <a:rPr sz="1000" b="1">
+                <a:solidFill>
+                  <a:srgbClr val="FFFFFF"/>
+                </a:solidFill>
+              </a:rPr>
+              <a:t>B</a:t>
+            </a:r>
+          </a:p>
+        </p:txBody>
+      </p:sp>
+      <p:sp>
+        <p:nvSpPr>
+          <p:cNvPr id="31" name="TextBox 30"/>
+          <p:cNvSpPr txBox="1"/>
+          <p:nvPr/>
+        </p:nvSpPr>
+        <p:spPr>
+          <a:xfrm>
+            <a:off x="932688" y="3579875"/>
+            <a:ext cx="8778240" cy="274320"/>
+          </a:xfrm>
+          <a:prstGeom prst="rect">
+            <a:avLst/>
+          </a:prstGeom>
+          <a:noFill/>
+        </p:spPr>
+        <p:txBody>
+          <a:bodyPr wrap="square" anchor="ctr" lIns="0" rIns="0" tIns="0" bIns="0">
+            <a:spAutoFit/>
+          </a:bodyPr>
+          <a:lstStyle/>
+          <a:p>
+            <a:pPr algn="l">
+              <a:lnSpc>
+                <a:spcPct val="114000"/>
+              </a:lnSpc>
+            </a:pPr>
+            <a:r>
+              <a:rPr sz="1050" b="1">
+                <a:solidFill>
+                  <a:srgbClr val="1B2B28"/>
+                </a:solidFill>
+              </a:rPr>
+              <a:t>优秀</a:t>
+            </a:r>
+            <a:r>
+              <a:rPr sz="850" b="0">
+                <a:solidFill>
+                  <a:srgbClr val="5C6E6A"/>
+                </a:solidFill>
+              </a:rPr>
+              <a:t>   验收口径：</a:t>
+            </a:r>
+            <a:r>
+              <a:rPr sz="850" b="0">
+                <a:solidFill>
+                  <a:srgbClr val="5C6E6A"/>
+                </a:solidFill>
+              </a:rPr>
+              <a:t>≥7指标+钻取交互；异常自动识别；美观度≥4/5</a:t>
+            </a:r>
+          </a:p>
+        </p:txBody>
+      </p:sp>
+      <p:sp>
+        <p:nvSpPr>
+          <p:cNvPr id="32" name="Rounded Rectangle 31"/>
+          <p:cNvSpPr/>
+          <p:nvPr/>
+        </p:nvSpPr>
+        <p:spPr>
+          <a:xfrm>
+            <a:off x="11131803" y="3607308"/>
+            <a:ext cx="453644" cy="237744"/>
+          </a:xfrm>
+          <a:prstGeom prst="roundRect">
+            <a:avLst>
+              <a:gd name="adj" fmla="val 50000"/>
+            </a:avLst>
+          </a:prstGeom>
+          <a:solidFill>
+            <a:srgbClr val="0B5E54"/>
+          </a:solidFill>
+          <a:ln>
+            <a:noFill/>
+          </a:ln>
+          <a:effectLst/>
+        </p:spPr>
+        <p:style>
+          <a:lnRef idx="1">
+            <a:schemeClr val="accent1"/>
+          </a:lnRef>
+          <a:fillRef idx="3">
+            <a:schemeClr val="accent1"/>
+          </a:fillRef>
+          <a:effectRef idx="2">
+            <a:schemeClr val="accent1"/>
+          </a:effectRef>
+          <a:fontRef idx="minor">
+            <a:schemeClr val="lt1"/>
+          </a:fontRef>
+        </p:style>
+        <p:txBody>
+          <a:bodyPr rtlCol="0" anchor="ctr"/>
+          <a:lstStyle/>
+          <a:p>
+            <a:pPr algn="ctr"/>
+          </a:p>
+        </p:txBody>
+      </p:sp>
+      <p:sp>
+        <p:nvSpPr>
+          <p:cNvPr id="33" name="TextBox 32"/>
+          <p:cNvSpPr txBox="1"/>
+          <p:nvPr/>
+        </p:nvSpPr>
+        <p:spPr>
+          <a:xfrm>
+            <a:off x="11131803" y="3607308"/>
+            <a:ext cx="453644" cy="237744"/>
+          </a:xfrm>
+          <a:prstGeom prst="rect">
+            <a:avLst/>
+          </a:prstGeom>
+          <a:noFill/>
+        </p:spPr>
+        <p:txBody>
+          <a:bodyPr wrap="square" anchor="ctr" lIns="0" rIns="0" tIns="0" bIns="0">
+            <a:spAutoFit/>
+          </a:bodyPr>
+          <a:lstStyle/>
+          <a:p>
+            <a:pPr algn="ctr">
+              <a:lnSpc>
+                <a:spcPct val="114000"/>
+              </a:lnSpc>
+            </a:pPr>
+            <a:r>
+              <a:rPr sz="850" b="1">
+                <a:solidFill>
+                  <a:srgbClr val="FFFFFF"/>
+                </a:solidFill>
+              </a:rPr>
+              <a:t>达标</a:t>
+            </a:r>
+          </a:p>
+        </p:txBody>
+      </p:sp>
+      <p:sp>
+        <p:nvSpPr>
+          <p:cNvPr id="34" name="TextBox 33"/>
+          <p:cNvSpPr txBox="1"/>
+          <p:nvPr/>
+        </p:nvSpPr>
+        <p:spPr>
+          <a:xfrm>
+            <a:off x="932688" y="3863339"/>
+            <a:ext cx="10671047" cy="423161"/>
+          </a:xfrm>
+          <a:prstGeom prst="rect">
+            <a:avLst/>
+          </a:prstGeom>
+          <a:noFill/>
+        </p:spPr>
+        <p:txBody>
+          <a:bodyPr wrap="square" anchor="t" lIns="0" rIns="0" tIns="0" bIns="0">
+            <a:spAutoFit/>
+          </a:bodyPr>
+          <a:lstStyle/>
+          <a:p>
+            <a:pPr algn="l">
+              <a:lnSpc>
+                <a:spcPct val="114000"/>
+              </a:lnSpc>
+            </a:pPr>
+            <a:r>
+              <a:rPr sz="950" b="0">
+                <a:solidFill>
+                  <a:srgbClr val="1B2B28"/>
+                </a:solidFill>
+              </a:rPr>
+              <a:t>指标实得 9 个；钻取：复放选择事件 x=['2026-03-03', '2026-03-05', '2026-03-07'] → 联动明细 30 行（上限 30）指纹 crc32=e89f637a（跨 PYTHONHASHSEED 稳定）；异常自动识别命中 357 条（temp&gt;90.0 或 vib&gt;4.5，逐条附处置建议）；美观度 5/5（≥4 达标；标题层级 1/1、单位标注 1/1、配色 1/1、图例 1/1、响应式 1/1；扣分项：无）</a:t>
+            </a:r>
+          </a:p>
+        </p:txBody>
+      </p:sp>
+      <p:sp>
+        <p:nvSpPr>
+          <p:cNvPr id="35" name="Rounded Rectangle 34"/>
+          <p:cNvSpPr/>
+          <p:nvPr/>
+        </p:nvSpPr>
+        <p:spPr>
+          <a:xfrm>
+            <a:off x="475488" y="4405373"/>
+            <a:ext cx="11237976" cy="1007874"/>
+          </a:xfrm>
+          <a:prstGeom prst="roundRect">
+            <a:avLst>
+              <a:gd name="adj" fmla="val 6000"/>
+            </a:avLst>
+          </a:prstGeom>
+          <a:solidFill>
+            <a:srgbClr val="FFFFFF"/>
+          </a:solidFill>
+          <a:ln w="9525">
+            <a:solidFill>
+              <a:srgbClr val="E4F1EE"/>
+            </a:solidFill>
+          </a:ln>
+          <a:effectLst/>
+        </p:spPr>
+        <p:style>
+          <a:lnRef idx="1">
+            <a:schemeClr val="accent1"/>
+          </a:lnRef>
+          <a:fillRef idx="3">
+            <a:schemeClr val="accent1"/>
+          </a:fillRef>
+          <a:effectRef idx="2">
+            <a:schemeClr val="accent1"/>
+          </a:effectRef>
+          <a:fontRef idx="minor">
+            <a:schemeClr val="lt1"/>
+          </a:fontRef>
+        </p:style>
+        <p:txBody>
+          <a:bodyPr rtlCol="0" anchor="ctr"/>
+          <a:lstStyle/>
+          <a:p>
+            <a:pPr algn="ctr"/>
+          </a:p>
+        </p:txBody>
+      </p:sp>
+      <p:sp>
+        <p:nvSpPr>
+          <p:cNvPr id="36" name="Rounded Rectangle 35"/>
+          <p:cNvSpPr/>
+          <p:nvPr/>
+        </p:nvSpPr>
+        <p:spPr>
+          <a:xfrm>
+            <a:off x="475488" y="4405373"/>
+            <a:ext cx="54864" cy="1007874"/>
+          </a:xfrm>
+          <a:prstGeom prst="roundRect">
+            <a:avLst>
+              <a:gd name="adj" fmla="val 50000"/>
+            </a:avLst>
+          </a:prstGeom>
+          <a:solidFill>
+            <a:srgbClr val="C9A227"/>
+          </a:solidFill>
+          <a:ln>
+            <a:noFill/>
+          </a:ln>
+          <a:effectLst/>
+        </p:spPr>
+        <p:style>
+          <a:lnRef idx="1">
+            <a:schemeClr val="accent1"/>
+          </a:lnRef>
+          <a:fillRef idx="3">
+            <a:schemeClr val="accent1"/>
+          </a:fillRef>
+          <a:effectRef idx="2">
+            <a:schemeClr val="accent1"/>
+          </a:effectRef>
+          <a:fontRef idx="minor">
+            <a:schemeClr val="lt1"/>
+          </a:fontRef>
+        </p:style>
+        <p:txBody>
+          <a:bodyPr rtlCol="0" anchor="ctr"/>
+          <a:lstStyle/>
+          <a:p>
+            <a:pPr algn="ctr"/>
+          </a:p>
+        </p:txBody>
+      </p:sp>
+      <p:sp>
+        <p:nvSpPr>
+          <p:cNvPr id="37" name="Rounded Rectangle 36"/>
+          <p:cNvSpPr/>
+          <p:nvPr/>
+        </p:nvSpPr>
+        <p:spPr>
+          <a:xfrm>
+            <a:off x="621792" y="4487669"/>
+            <a:ext cx="237744" cy="237744"/>
+          </a:xfrm>
+          <a:prstGeom prst="roundRect">
+            <a:avLst>
+              <a:gd name="adj" fmla="val 28000"/>
+            </a:avLst>
+          </a:prstGeom>
+          <a:solidFill>
+            <a:srgbClr val="C9A227"/>
+          </a:solidFill>
+          <a:ln>
+            <a:noFill/>
+          </a:ln>
+          <a:effectLst/>
+        </p:spPr>
+        <p:style>
+          <a:lnRef idx="1">
+            <a:schemeClr val="accent1"/>
+          </a:lnRef>
+          <a:fillRef idx="3">
+            <a:schemeClr val="accent1"/>
+          </a:fillRef>
+          <a:effectRef idx="2">
+            <a:schemeClr val="accent1"/>
+          </a:effectRef>
+          <a:fontRef idx="minor">
+            <a:schemeClr val="lt1"/>
+          </a:fontRef>
+        </p:style>
+        <p:txBody>
+          <a:bodyPr rtlCol="0" anchor="ctr"/>
+          <a:lstStyle/>
+          <a:p>
+            <a:pPr algn="ctr"/>
+          </a:p>
+        </p:txBody>
+      </p:sp>
+      <p:sp>
+        <p:nvSpPr>
+          <p:cNvPr id="38" name="TextBox 37"/>
+          <p:cNvSpPr txBox="1"/>
+          <p:nvPr/>
+        </p:nvSpPr>
+        <p:spPr>
+          <a:xfrm>
+            <a:off x="621792" y="4487669"/>
+            <a:ext cx="237744" cy="237744"/>
+          </a:xfrm>
+          <a:prstGeom prst="rect">
+            <a:avLst/>
+          </a:prstGeom>
+          <a:noFill/>
+        </p:spPr>
+        <p:txBody>
+          <a:bodyPr wrap="square" anchor="ctr" lIns="0" rIns="0" tIns="0" bIns="0">
+            <a:spAutoFit/>
+          </a:bodyPr>
+          <a:lstStyle/>
+          <a:p>
+            <a:pPr algn="ctr">
+              <a:lnSpc>
+                <a:spcPct val="114000"/>
+              </a:lnSpc>
+            </a:pPr>
+            <a:r>
+              <a:rPr sz="1000" b="1">
+                <a:solidFill>
+                  <a:srgbClr val="FFFFFF"/>
+                </a:solidFill>
+              </a:rPr>
+              <a:t>A</a:t>
+            </a:r>
+          </a:p>
+        </p:txBody>
+      </p:sp>
+      <p:sp>
+        <p:nvSpPr>
+          <p:cNvPr id="39" name="TextBox 38"/>
+          <p:cNvSpPr txBox="1"/>
+          <p:nvPr/>
+        </p:nvSpPr>
+        <p:spPr>
+          <a:xfrm>
+            <a:off x="932688" y="4469381"/>
+            <a:ext cx="8778240" cy="274320"/>
+          </a:xfrm>
+          <a:prstGeom prst="rect">
+            <a:avLst/>
+          </a:prstGeom>
+          <a:noFill/>
+        </p:spPr>
+        <p:txBody>
+          <a:bodyPr wrap="square" anchor="ctr" lIns="0" rIns="0" tIns="0" bIns="0">
+            <a:spAutoFit/>
+          </a:bodyPr>
+          <a:lstStyle/>
+          <a:p>
+            <a:pPr algn="l">
+              <a:lnSpc>
+                <a:spcPct val="114000"/>
+              </a:lnSpc>
+            </a:pPr>
+            <a:r>
+              <a:rPr sz="1050" b="1">
+                <a:solidFill>
+                  <a:srgbClr val="1B2B28"/>
+                </a:solidFill>
+              </a:rPr>
+              <a:t>超优</a:t>
+            </a:r>
+            <a:r>
+              <a:rPr sz="850" b="0">
+                <a:solidFill>
+                  <a:srgbClr val="5C6E6A"/>
+                </a:solidFill>
+              </a:rPr>
+              <a:t>   验收口径：</a:t>
+            </a:r>
+            <a:r>
+              <a:rPr sz="850" b="0">
+                <a:solidFill>
+                  <a:srgbClr val="5C6E6A"/>
+                </a:solidFill>
+              </a:rPr>
+              <a:t>优秀+定时自动生成(mailto/计划任务)+移动端适配</a:t>
+            </a:r>
+          </a:p>
+        </p:txBody>
+      </p:sp>
+      <p:sp>
+        <p:nvSpPr>
+          <p:cNvPr id="40" name="Rounded Rectangle 39"/>
+          <p:cNvSpPr/>
+          <p:nvPr/>
+        </p:nvSpPr>
+        <p:spPr>
+          <a:xfrm>
+            <a:off x="11131803" y="4496813"/>
+            <a:ext cx="453644" cy="237744"/>
+          </a:xfrm>
+          <a:prstGeom prst="roundRect">
+            <a:avLst>
+              <a:gd name="adj" fmla="val 50000"/>
+            </a:avLst>
+          </a:prstGeom>
+          <a:solidFill>
+            <a:srgbClr val="0B5E54"/>
+          </a:solidFill>
+          <a:ln>
+            <a:noFill/>
+          </a:ln>
+          <a:effectLst/>
+        </p:spPr>
+        <p:style>
+          <a:lnRef idx="1">
+            <a:schemeClr val="accent1"/>
+          </a:lnRef>
+          <a:fillRef idx="3">
+            <a:schemeClr val="accent1"/>
+          </a:fillRef>
+          <a:effectRef idx="2">
+            <a:schemeClr val="accent1"/>
+          </a:effectRef>
+          <a:fontRef idx="minor">
+            <a:schemeClr val="lt1"/>
+          </a:fontRef>
+        </p:style>
+        <p:txBody>
+          <a:bodyPr rtlCol="0" anchor="ctr"/>
+          <a:lstStyle/>
+          <a:p>
+            <a:pPr algn="ctr"/>
+          </a:p>
+        </p:txBody>
+      </p:sp>
+      <p:sp>
+        <p:nvSpPr>
+          <p:cNvPr id="41" name="TextBox 40"/>
+          <p:cNvSpPr txBox="1"/>
+          <p:nvPr/>
+        </p:nvSpPr>
+        <p:spPr>
+          <a:xfrm>
+            <a:off x="11131803" y="4496813"/>
+            <a:ext cx="453644" cy="237744"/>
+          </a:xfrm>
+          <a:prstGeom prst="rect">
+            <a:avLst/>
+          </a:prstGeom>
+          <a:noFill/>
+        </p:spPr>
+        <p:txBody>
+          <a:bodyPr wrap="square" anchor="ctr" lIns="0" rIns="0" tIns="0" bIns="0">
+            <a:spAutoFit/>
+          </a:bodyPr>
+          <a:lstStyle/>
+          <a:p>
+            <a:pPr algn="ctr">
+              <a:lnSpc>
+                <a:spcPct val="114000"/>
+              </a:lnSpc>
+            </a:pPr>
+            <a:r>
+              <a:rPr sz="850" b="1">
+                <a:solidFill>
+                  <a:srgbClr val="FFFFFF"/>
+                </a:solidFill>
+              </a:rPr>
+              <a:t>达标</a:t>
+            </a:r>
+          </a:p>
+        </p:txBody>
+      </p:sp>
+      <p:sp>
+        <p:nvSpPr>
+          <p:cNvPr id="42" name="TextBox 41"/>
+          <p:cNvSpPr txBox="1"/>
+          <p:nvPr/>
+        </p:nvSpPr>
+        <p:spPr>
+          <a:xfrm>
+            <a:off x="932688" y="4752845"/>
+            <a:ext cx="10671047" cy="605538"/>
+          </a:xfrm>
+          <a:prstGeom prst="rect">
+            <a:avLst/>
+          </a:prstGeom>
+          <a:noFill/>
+        </p:spPr>
+        <p:txBody>
+          <a:bodyPr wrap="square" anchor="t" lIns="0" rIns="0" tIns="0" bIns="0">
+            <a:spAutoFit/>
+          </a:bodyPr>
+          <a:lstStyle/>
+          <a:p>
+            <a:pPr algn="l">
+              <a:lnSpc>
+                <a:spcPct val="114000"/>
+              </a:lnSpc>
+            </a:pPr>
+            <a:r>
+              <a:rPr sz="950" b="0">
+                <a:solidFill>
+                  <a:srgbClr val="1B2B28"/>
+                </a:solidFill>
+              </a:rPr>
+              <a:t>继承优秀(B)：达标；定时：schedule.at=07:30 解析为每日 07:30，下次触发为真实 datetime 且晚于此刻（墙钟值写 runtime/schedule_state.txt 与 output/timing.txt，不进判定行）；计划任务 4 件产物已渲染（crontab/systemd/launchd/mailto，写 runtime/schedule/）；mailto 收件人 line-lead@example.com 且 subject/body 齐；移动端：viewport=True flex=True media=True 窄屏断点 600px（config 上限 768px）</a:t>
+            </a:r>
+          </a:p>
+        </p:txBody>
+      </p:sp>
+      <p:sp>
+        <p:nvSpPr>
+          <p:cNvPr id="43" name="Rounded Rectangle 42"/>
+          <p:cNvSpPr/>
+          <p:nvPr/>
+        </p:nvSpPr>
+        <p:spPr>
+          <a:xfrm>
+            <a:off x="475488" y="5477256"/>
+            <a:ext cx="11237976" cy="941831"/>
+          </a:xfrm>
+          <a:prstGeom prst="roundRect">
+            <a:avLst>
+              <a:gd name="adj" fmla="val 5000"/>
+            </a:avLst>
+          </a:prstGeom>
+          <a:solidFill>
+            <a:srgbClr val="E4F1EE"/>
+          </a:solidFill>
+          <a:ln>
+            <a:noFill/>
+          </a:ln>
+          <a:effectLst/>
+        </p:spPr>
+        <p:style>
+          <a:lnRef idx="1">
+            <a:schemeClr val="accent1"/>
+          </a:lnRef>
+          <a:fillRef idx="3">
+            <a:schemeClr val="accent1"/>
+          </a:fillRef>
+          <a:effectRef idx="2">
+            <a:schemeClr val="accent1"/>
+          </a:effectRef>
+          <a:fontRef idx="minor">
+            <a:schemeClr val="lt1"/>
+          </a:fontRef>
+        </p:style>
+        <p:txBody>
+          <a:bodyPr rtlCol="0" anchor="ctr"/>
+          <a:lstStyle/>
+          <a:p>
+            <a:pPr algn="ctr"/>
+          </a:p>
+        </p:txBody>
+      </p:sp>
+      <p:sp>
+        <p:nvSpPr>
+          <p:cNvPr id="44" name="Rounded Rectangle 43"/>
+          <p:cNvSpPr/>
+          <p:nvPr/>
+        </p:nvSpPr>
+        <p:spPr>
+          <a:xfrm>
+            <a:off x="475488" y="5477256"/>
+            <a:ext cx="54864" cy="941831"/>
+          </a:xfrm>
+          <a:prstGeom prst="roundRect">
+            <a:avLst>
+              <a:gd name="adj" fmla="val 50000"/>
+            </a:avLst>
+          </a:prstGeom>
+          <a:solidFill>
+            <a:srgbClr val="C9A227"/>
+          </a:solidFill>
+          <a:ln>
+            <a:noFill/>
+          </a:ln>
+          <a:effectLst/>
+        </p:spPr>
+        <p:style>
+          <a:lnRef idx="1">
+            <a:schemeClr val="accent1"/>
+          </a:lnRef>
+          <a:fillRef idx="3">
+            <a:schemeClr val="accent1"/>
+          </a:fillRef>
+          <a:effectRef idx="2">
+            <a:schemeClr val="accent1"/>
+          </a:effectRef>
+          <a:fontRef idx="minor">
+            <a:schemeClr val="lt1"/>
+          </a:fontRef>
+        </p:style>
+        <p:txBody>
+          <a:bodyPr rtlCol="0" anchor="ctr"/>
+          <a:lstStyle/>
+          <a:p>
+            <a:pPr algn="ctr"/>
+          </a:p>
+        </p:txBody>
+      </p:sp>
+      <p:sp>
+        <p:nvSpPr>
+          <p:cNvPr id="45" name="TextBox 44"/>
+          <p:cNvSpPr txBox="1"/>
+          <p:nvPr/>
+        </p:nvSpPr>
+        <p:spPr>
+          <a:xfrm>
+            <a:off x="676656" y="5550408"/>
+            <a:ext cx="10908792" cy="795527"/>
+          </a:xfrm>
+          <a:prstGeom prst="rect">
+            <a:avLst/>
+          </a:prstGeom>
+          <a:noFill/>
+        </p:spPr>
+        <p:txBody>
+          <a:bodyPr wrap="square" anchor="t" lIns="0" rIns="0" tIns="0" bIns="0">
+            <a:spAutoFit/>
+          </a:bodyPr>
+          <a:lstStyle/>
+          <a:p>
+            <a:pPr algn="l">
+              <a:lnSpc>
+                <a:spcPct val="124000"/>
+              </a:lnSpc>
+            </a:pPr>
+            <a:r>
+              <a:rPr sz="850" b="0">
+                <a:solidFill>
+                  <a:srgbClr val="1B2B28"/>
+                </a:solidFill>
+              </a:rPr>
+              <a:t>出处：工程化项目/p33_kpi_cockpit/output/report.txt 第 15 节「分层达标」——本机 2026-10-28 05:08 实跑落盘，上表数字逐字摘录、未改写。</a:t>
+            </a:r>
+          </a:p>
+          <a:p>
+            <a:pPr algn="l">
+              <a:lnSpc>
+                <a:spcPct val="124000"/>
+              </a:lnSpc>
+            </a:pPr>
+            <a:r>
+              <a:rPr sz="850" b="0">
+                <a:solidFill>
+                  <a:srgbClr val="1B2B28"/>
+                </a:solidFill>
+              </a:rPr>
+              <a:t>复现：cd 工程化项目/p33_kpi_cockpit &amp;&amp; python run.py &amp;&amp; python -m pytest -q -o addopts=''</a:t>
+            </a:r>
+          </a:p>
+          <a:p>
+            <a:pPr algn="l">
+              <a:lnSpc>
+                <a:spcPct val="124000"/>
+              </a:lnSpc>
+            </a:pPr>
+            <a:r>
+              <a:rPr sz="850" b="0">
+                <a:solidFill>
+                  <a:srgbClr val="1B2B28"/>
+                </a:solidFill>
+              </a:rPr>
+              <a:t>口径：表中「判定」沿用报告原词——绿=达标/通过，黄=仅本节取证项通过（未取证子项在报告里逐条点名），红=未达标。</a:t>
+            </a:r>
+          </a:p>
+        </p:txBody>
+      </p:sp>
+    </p:spTree>
+  </p:cSld>
+  <p:clrMapOvr>
+    <a:masterClrMapping/>
+  </p:clrMapOvr>
+</p:sld>
+</file>
+
+<file path=ppt/slides/slide64.xml><?xml version="1.0" encoding="utf-8"?>
+<p:sld xmlns:a="http://schemas.openxmlformats.org/drawingml/2006/main" xmlns:p="http://schemas.openxmlformats.org/presentationml/2006/main" xmlns:r="http://schemas.openxmlformats.org/officeDocument/2006/relationships">
+  <p:cSld>
+    <p:spTree>
+      <p:nvGrpSpPr>
+        <p:cNvPr id="1" name=""/>
+        <p:cNvGrpSpPr/>
+        <p:nvPr/>
+      </p:nvGrpSpPr>
+      <p:grpSpPr/>
+      <p:sp>
+        <p:nvSpPr>
+          <p:cNvPr id="2" name="Rounded Rectangle 1"/>
+          <p:cNvSpPr/>
+          <p:nvPr/>
+        </p:nvSpPr>
+        <p:spPr>
+          <a:xfrm>
+            <a:off x="0" y="0"/>
+            <a:ext cx="12191695" cy="64008"/>
+          </a:xfrm>
+          <a:prstGeom prst="roundRect">
+            <a:avLst>
+              <a:gd name="adj" fmla="val 50000"/>
+            </a:avLst>
+          </a:prstGeom>
+          <a:solidFill>
+            <a:srgbClr val="0B5E54"/>
+          </a:solidFill>
+          <a:ln>
+            <a:noFill/>
+          </a:ln>
+          <a:effectLst/>
+        </p:spPr>
+        <p:style>
+          <a:lnRef idx="1">
+            <a:schemeClr val="accent1"/>
+          </a:lnRef>
+          <a:fillRef idx="3">
+            <a:schemeClr val="accent1"/>
+          </a:fillRef>
+          <a:effectRef idx="2">
+            <a:schemeClr val="accent1"/>
+          </a:effectRef>
+          <a:fontRef idx="minor">
+            <a:schemeClr val="lt1"/>
+          </a:fontRef>
+        </p:style>
+        <p:txBody>
+          <a:bodyPr rtlCol="0" anchor="ctr"/>
+          <a:lstStyle/>
+          <a:p>
+            <a:pPr algn="ctr"/>
+          </a:p>
+        </p:txBody>
+      </p:sp>
+      <p:sp>
+        <p:nvSpPr>
+          <p:cNvPr id="3" name="TextBox 2"/>
+          <p:cNvSpPr txBox="1"/>
+          <p:nvPr/>
+        </p:nvSpPr>
+        <p:spPr>
+          <a:xfrm>
+            <a:off x="475488" y="146304"/>
+            <a:ext cx="8229600" cy="292608"/>
+          </a:xfrm>
+          <a:prstGeom prst="rect">
+            <a:avLst/>
+          </a:prstGeom>
+          <a:noFill/>
+        </p:spPr>
+        <p:txBody>
+          <a:bodyPr wrap="square" anchor="t" lIns="0" rIns="0" tIns="0" bIns="0">
+            <a:spAutoFit/>
+          </a:bodyPr>
+          <a:lstStyle/>
+          <a:p>
+            <a:pPr algn="l">
+              <a:lnSpc>
+                <a:spcPct val="114000"/>
+              </a:lnSpc>
+            </a:pPr>
+            <a:r>
+              <a:rPr sz="1100" b="1">
+                <a:solidFill>
+                  <a:srgbClr val="0B5E54"/>
+                </a:solidFill>
+              </a:rPr>
+              <a:t>工单实战 · 运行留证</a:t>
+            </a:r>
+          </a:p>
+        </p:txBody>
+      </p:sp>
+      <p:sp>
+        <p:nvSpPr>
+          <p:cNvPr id="4" name="Rounded Rectangle 3"/>
+          <p:cNvSpPr/>
+          <p:nvPr/>
+        </p:nvSpPr>
+        <p:spPr>
+          <a:xfrm>
+            <a:off x="475488" y="475488"/>
+            <a:ext cx="2027872" cy="310896"/>
+          </a:xfrm>
+          <a:prstGeom prst="roundRect">
+            <a:avLst>
+              <a:gd name="adj" fmla="val 50000"/>
+            </a:avLst>
+          </a:prstGeom>
+          <a:solidFill>
+            <a:srgbClr val="C9A227"/>
+          </a:solidFill>
+          <a:ln>
+            <a:noFill/>
+          </a:ln>
+          <a:effectLst/>
+        </p:spPr>
+        <p:style>
+          <a:lnRef idx="1">
+            <a:schemeClr val="accent1"/>
+          </a:lnRef>
+          <a:fillRef idx="3">
+            <a:schemeClr val="accent1"/>
+          </a:fillRef>
+          <a:effectRef idx="2">
+            <a:schemeClr val="accent1"/>
+          </a:effectRef>
+          <a:fontRef idx="minor">
+            <a:schemeClr val="lt1"/>
+          </a:fontRef>
+        </p:style>
+        <p:txBody>
+          <a:bodyPr rtlCol="0" anchor="ctr"/>
+          <a:lstStyle/>
+          <a:p>
+            <a:pPr algn="ctr"/>
+          </a:p>
+        </p:txBody>
+      </p:sp>
+      <p:sp>
+        <p:nvSpPr>
+          <p:cNvPr id="5" name="TextBox 4"/>
+          <p:cNvSpPr txBox="1"/>
+          <p:nvPr/>
+        </p:nvSpPr>
+        <p:spPr>
+          <a:xfrm>
+            <a:off x="475488" y="475488"/>
+            <a:ext cx="2027872" cy="310896"/>
+          </a:xfrm>
+          <a:prstGeom prst="rect">
+            <a:avLst/>
+          </a:prstGeom>
+          <a:noFill/>
+        </p:spPr>
+        <p:txBody>
+          <a:bodyPr wrap="square" anchor="ctr" lIns="0" rIns="0" tIns="0" bIns="0">
+            <a:spAutoFit/>
+          </a:bodyPr>
+          <a:lstStyle/>
+          <a:p>
+            <a:pPr algn="ctr">
+              <a:lnSpc>
+                <a:spcPct val="114000"/>
+              </a:lnSpc>
+            </a:pPr>
+            <a:r>
+              <a:rPr sz="1050" b="1">
+                <a:solidFill>
+                  <a:srgbClr val="FFFFFF"/>
+                </a:solidFill>
+              </a:rPr>
+              <a:t>SCREENSHOT · 终端逐字截图</a:t>
+            </a:r>
+          </a:p>
+        </p:txBody>
+      </p:sp>
+      <p:sp>
+        <p:nvSpPr>
+          <p:cNvPr id="6" name="TextBox 5"/>
+          <p:cNvSpPr txBox="1"/>
+          <p:nvPr/>
+        </p:nvSpPr>
+        <p:spPr>
+          <a:xfrm>
+            <a:off x="475488" y="859536"/>
+            <a:ext cx="11237976" cy="502920"/>
+          </a:xfrm>
+          <a:prstGeom prst="rect">
+            <a:avLst/>
+          </a:prstGeom>
+          <a:noFill/>
+        </p:spPr>
+        <p:txBody>
+          <a:bodyPr wrap="square" anchor="t" lIns="0" rIns="0" tIns="0" bIns="0">
+            <a:spAutoFit/>
+          </a:bodyPr>
+          <a:lstStyle/>
+          <a:p>
+            <a:pPr algn="l">
+              <a:lnSpc>
+                <a:spcPct val="114000"/>
+              </a:lnSpc>
+            </a:pPr>
+            <a:r>
+              <a:rPr sz="2200" b="1">
+                <a:solidFill>
+                  <a:srgbClr val="1B2B28"/>
+                </a:solidFill>
+              </a:rPr>
+              <a:t>P3.1/P3.2 分层达标 · 四档逐字输出截图</a:t>
+            </a:r>
+          </a:p>
+        </p:txBody>
+      </p:sp>
+      <p:sp>
+        <p:nvSpPr>
+          <p:cNvPr id="7" name="Rounded Rectangle 6"/>
+          <p:cNvSpPr/>
+          <p:nvPr/>
+        </p:nvSpPr>
+        <p:spPr>
+          <a:xfrm>
+            <a:off x="475488" y="1389888"/>
+            <a:ext cx="1234440" cy="27432"/>
+          </a:xfrm>
+          <a:prstGeom prst="roundRect">
+            <a:avLst>
+              <a:gd name="adj" fmla="val 50000"/>
+            </a:avLst>
+          </a:prstGeom>
+          <a:solidFill>
+            <a:srgbClr val="C9A227"/>
+          </a:solidFill>
+          <a:ln>
+            <a:noFill/>
+          </a:ln>
+          <a:effectLst/>
+        </p:spPr>
+        <p:style>
+          <a:lnRef idx="1">
+            <a:schemeClr val="accent1"/>
+          </a:lnRef>
+          <a:fillRef idx="3">
+            <a:schemeClr val="accent1"/>
+          </a:fillRef>
+          <a:effectRef idx="2">
+            <a:schemeClr val="accent1"/>
+          </a:effectRef>
+          <a:fontRef idx="minor">
+            <a:schemeClr val="lt1"/>
+          </a:fontRef>
+        </p:style>
+        <p:txBody>
+          <a:bodyPr rtlCol="0" anchor="ctr"/>
+          <a:lstStyle/>
+          <a:p>
+            <a:pPr algn="ctr"/>
+          </a:p>
+        </p:txBody>
+      </p:sp>
+      <p:sp>
+        <p:nvSpPr>
+          <p:cNvPr id="8" name="Rounded Rectangle 7"/>
+          <p:cNvSpPr/>
+          <p:nvPr/>
+        </p:nvSpPr>
+        <p:spPr>
+          <a:xfrm>
+            <a:off x="475488" y="6419088"/>
+            <a:ext cx="11237976" cy="10972"/>
+          </a:xfrm>
+          <a:prstGeom prst="roundRect">
+            <a:avLst>
+              <a:gd name="adj" fmla="val 50000"/>
+            </a:avLst>
+          </a:prstGeom>
+          <a:solidFill>
+            <a:srgbClr val="E4F1EE"/>
+          </a:solidFill>
+          <a:ln>
+            <a:noFill/>
+          </a:ln>
+          <a:effectLst/>
+        </p:spPr>
+        <p:style>
+          <a:lnRef idx="1">
+            <a:schemeClr val="accent1"/>
+          </a:lnRef>
+          <a:fillRef idx="3">
+            <a:schemeClr val="accent1"/>
+          </a:fillRef>
+          <a:effectRef idx="2">
+            <a:schemeClr val="accent1"/>
+          </a:effectRef>
+          <a:fontRef idx="minor">
+            <a:schemeClr val="lt1"/>
+          </a:fontRef>
+        </p:style>
+        <p:txBody>
+          <a:bodyPr rtlCol="0" anchor="ctr"/>
+          <a:lstStyle/>
+          <a:p>
+            <a:pPr algn="ctr"/>
+          </a:p>
+        </p:txBody>
+      </p:sp>
+      <p:sp>
+        <p:nvSpPr>
+          <p:cNvPr id="9" name="TextBox 8"/>
+          <p:cNvSpPr txBox="1"/>
+          <p:nvPr/>
+        </p:nvSpPr>
+        <p:spPr>
+          <a:xfrm>
+            <a:off x="475488" y="6455664"/>
+            <a:ext cx="7315200" cy="292608"/>
+          </a:xfrm>
+          <a:prstGeom prst="rect">
+            <a:avLst/>
+          </a:prstGeom>
+          <a:noFill/>
+        </p:spPr>
+        <p:txBody>
+          <a:bodyPr wrap="square" anchor="t" lIns="0" rIns="0" tIns="0" bIns="0">
+            <a:spAutoFit/>
+          </a:bodyPr>
+          <a:lstStyle/>
+          <a:p>
+            <a:pPr algn="l">
+              <a:lnSpc>
+                <a:spcPct val="114000"/>
+              </a:lnSpc>
+            </a:pPr>
+            <a:r>
+              <a:rPr sz="900" b="0">
+                <a:solidFill>
+                  <a:srgbClr val="5C6E6A"/>
+                </a:solidFill>
+              </a:rPr>
+              <a:t>两江智造集团 · Python程序设计（项目实战）</a:t>
+            </a:r>
+          </a:p>
+        </p:txBody>
+      </p:sp>
+      <p:sp>
+        <p:nvSpPr>
+          <p:cNvPr id="10" name="TextBox 9"/>
+          <p:cNvSpPr txBox="1"/>
+          <p:nvPr/>
+        </p:nvSpPr>
+        <p:spPr>
+          <a:xfrm>
+            <a:off x="10597896" y="6537960"/>
+            <a:ext cx="996696" cy="301752"/>
+          </a:xfrm>
+          <a:prstGeom prst="rect">
+            <a:avLst/>
+          </a:prstGeom>
+          <a:noFill/>
+        </p:spPr>
+        <p:txBody>
+          <a:bodyPr wrap="square" anchor="t" lIns="0" rIns="0" tIns="0" bIns="0">
+            <a:spAutoFit/>
+          </a:bodyPr>
+          <a:lstStyle/>
+          <a:p>
+            <a:pPr algn="r">
+              <a:lnSpc>
+                <a:spcPct val="114000"/>
+              </a:lnSpc>
+            </a:pPr>
+            <a:r>
+              <a:rPr sz="1000" b="0">
+                <a:solidFill>
+                  <a:srgbClr val="8A97B5"/>
+                </a:solidFill>
+              </a:rPr>
+              <a:t>49 / 65</a:t>
+            </a:r>
+          </a:p>
+        </p:txBody>
+      </p:sp>
+      <p:sp>
+        <p:nvSpPr>
+          <p:cNvPr id="11" name="TextBox 10"/>
+          <p:cNvSpPr txBox="1"/>
+          <p:nvPr/>
+        </p:nvSpPr>
+        <p:spPr>
+          <a:xfrm>
+            <a:off x="475488" y="1517904"/>
+            <a:ext cx="11237976" cy="237744"/>
+          </a:xfrm>
+          <a:prstGeom prst="rect">
+            <a:avLst/>
+          </a:prstGeom>
+          <a:noFill/>
+        </p:spPr>
+        <p:txBody>
+          <a:bodyPr wrap="square" anchor="t" lIns="0" rIns="0" tIns="0" bIns="0">
+            <a:spAutoFit/>
+          </a:bodyPr>
+          <a:lstStyle/>
+          <a:p>
+            <a:pPr algn="l">
+              <a:lnSpc>
+                <a:spcPct val="114000"/>
+              </a:lnSpc>
+            </a:pPr>
+            <a:r>
+              <a:rPr sz="1000" b="0">
+                <a:solidFill>
+                  <a:srgbClr val="5C6E6A"/>
+                </a:solidFill>
+              </a:rPr>
+              <a:t>终端窗口截图：由 report.txt 本节逐字渲染，未手工改写</a:t>
+            </a:r>
+          </a:p>
+        </p:txBody>
+      </p:sp>
+      <p:pic>
+        <p:nvPicPr>
+          <p:cNvPr id="12" name="Picture 11" descr="p33_kpi_cockpit_classroom.png"/>
+          <p:cNvPicPr>
+            <a:picLocks noChangeAspect="1"/>
+          </p:cNvPicPr>
+          <p:nvPr/>
+        </p:nvPicPr>
+        <p:blipFill>
+          <a:blip r:embed="rId2"/>
+          <a:stretch>
+            <a:fillRect/>
+          </a:stretch>
+        </p:blipFill>
+        <p:spPr>
+          <a:xfrm>
+            <a:off x="1478619" y="1792224"/>
+            <a:ext cx="9231712" cy="3849624"/>
+          </a:xfrm>
+          <a:prstGeom prst="rect">
+            <a:avLst/>
+          </a:prstGeom>
+        </p:spPr>
+      </p:pic>
+      <p:sp>
+        <p:nvSpPr>
+          <p:cNvPr id="13" name="TextBox 12"/>
+          <p:cNvSpPr txBox="1"/>
+          <p:nvPr/>
+        </p:nvSpPr>
+        <p:spPr>
+          <a:xfrm>
+            <a:off x="475488" y="5678424"/>
+            <a:ext cx="11237976" cy="256032"/>
+          </a:xfrm>
+          <a:prstGeom prst="rect">
+            <a:avLst/>
+          </a:prstGeom>
+          <a:noFill/>
+        </p:spPr>
+        <p:txBody>
+          <a:bodyPr wrap="square" anchor="t" lIns="0" rIns="0" tIns="0" bIns="0">
+            <a:spAutoFit/>
+          </a:bodyPr>
+          <a:lstStyle/>
+          <a:p>
+            <a:pPr algn="l">
+              <a:lnSpc>
+                <a:spcPct val="114000"/>
+              </a:lnSpc>
+            </a:pPr>
+            <a:r>
+              <a:rPr sz="850" b="0">
+                <a:solidFill>
+                  <a:srgbClr val="5C6E6A"/>
+                </a:solidFill>
+              </a:rPr>
+              <a:t>▲ p33_kpi_cockpit：分层达标 第 15 行起的四档逐字原文（绿=达标/通过，黄=仅本节取证项，橙=未实测项）</a:t>
+            </a:r>
+          </a:p>
+        </p:txBody>
+      </p:sp>
+    </p:spTree>
+  </p:cSld>
+  <p:clrMapOvr>
+    <a:masterClrMapping/>
+  </p:clrMapOvr>
+</p:sld>
+</file>
+
+<file path=ppt/slides/slide65.xml><?xml version="1.0" encoding="utf-8"?>
+<p:sld xmlns:a="http://schemas.openxmlformats.org/drawingml/2006/main" xmlns:p="http://schemas.openxmlformats.org/presentationml/2006/main" xmlns:r="http://schemas.openxmlformats.org/officeDocument/2006/relationships">
+  <p:cSld>
+    <p:spTree>
+      <p:nvGrpSpPr>
+        <p:cNvPr id="1" name=""/>
+        <p:cNvGrpSpPr/>
+        <p:nvPr/>
+      </p:nvGrpSpPr>
+      <p:grpSpPr/>
+      <p:sp>
+        <p:nvSpPr>
+          <p:cNvPr id="2" name="Rounded Rectangle 1"/>
+          <p:cNvSpPr/>
+          <p:nvPr/>
+        </p:nvSpPr>
+        <p:spPr>
+          <a:xfrm>
+            <a:off x="0" y="0"/>
+            <a:ext cx="12191695" cy="64008"/>
+          </a:xfrm>
+          <a:prstGeom prst="roundRect">
+            <a:avLst>
+              <a:gd name="adj" fmla="val 50000"/>
+            </a:avLst>
+          </a:prstGeom>
+          <a:solidFill>
+            <a:srgbClr val="0B5E54"/>
+          </a:solidFill>
+          <a:ln>
+            <a:noFill/>
+          </a:ln>
+          <a:effectLst/>
+        </p:spPr>
+        <p:style>
+          <a:lnRef idx="1">
+            <a:schemeClr val="accent1"/>
+          </a:lnRef>
+          <a:fillRef idx="3">
+            <a:schemeClr val="accent1"/>
+          </a:fillRef>
+          <a:effectRef idx="2">
+            <a:schemeClr val="accent1"/>
+          </a:effectRef>
+          <a:fontRef idx="minor">
+            <a:schemeClr val="lt1"/>
+          </a:fontRef>
+        </p:style>
+        <p:txBody>
+          <a:bodyPr rtlCol="0" anchor="ctr"/>
+          <a:lstStyle/>
+          <a:p>
+            <a:pPr algn="ctr"/>
+          </a:p>
+        </p:txBody>
+      </p:sp>
+      <p:sp>
+        <p:nvSpPr>
+          <p:cNvPr id="3" name="TextBox 2"/>
+          <p:cNvSpPr txBox="1"/>
+          <p:nvPr/>
+        </p:nvSpPr>
+        <p:spPr>
+          <a:xfrm>
+            <a:off x="475488" y="146304"/>
+            <a:ext cx="8229600" cy="292608"/>
+          </a:xfrm>
+          <a:prstGeom prst="rect">
+            <a:avLst/>
+          </a:prstGeom>
+          <a:noFill/>
+        </p:spPr>
+        <p:txBody>
+          <a:bodyPr wrap="square" anchor="t" lIns="0" rIns="0" tIns="0" bIns="0">
+            <a:spAutoFit/>
+          </a:bodyPr>
+          <a:lstStyle/>
+          <a:p>
+            <a:pPr algn="l">
+              <a:lnSpc>
+                <a:spcPct val="114000"/>
+              </a:lnSpc>
+            </a:pPr>
+            <a:r>
+              <a:rPr sz="1100" b="1">
+                <a:solidFill>
+                  <a:srgbClr val="0B5E54"/>
+                </a:solidFill>
+              </a:rPr>
+              <a:t>工单实战 · 运行留证</a:t>
+            </a:r>
+          </a:p>
+        </p:txBody>
+      </p:sp>
+      <p:sp>
+        <p:nvSpPr>
+          <p:cNvPr id="4" name="Rounded Rectangle 3"/>
+          <p:cNvSpPr/>
+          <p:nvPr/>
+        </p:nvSpPr>
+        <p:spPr>
+          <a:xfrm>
+            <a:off x="475488" y="475488"/>
+            <a:ext cx="2027872" cy="310896"/>
+          </a:xfrm>
+          <a:prstGeom prst="roundRect">
+            <a:avLst>
+              <a:gd name="adj" fmla="val 50000"/>
+            </a:avLst>
+          </a:prstGeom>
+          <a:solidFill>
+            <a:srgbClr val="C9A227"/>
+          </a:solidFill>
+          <a:ln>
+            <a:noFill/>
+          </a:ln>
+          <a:effectLst/>
+        </p:spPr>
+        <p:style>
+          <a:lnRef idx="1">
+            <a:schemeClr val="accent1"/>
+          </a:lnRef>
+          <a:fillRef idx="3">
+            <a:schemeClr val="accent1"/>
+          </a:fillRef>
+          <a:effectRef idx="2">
+            <a:schemeClr val="accent1"/>
+          </a:effectRef>
+          <a:fontRef idx="minor">
+            <a:schemeClr val="lt1"/>
+          </a:fontRef>
+        </p:style>
+        <p:txBody>
+          <a:bodyPr rtlCol="0" anchor="ctr"/>
+          <a:lstStyle/>
+          <a:p>
+            <a:pPr algn="ctr"/>
+          </a:p>
+        </p:txBody>
+      </p:sp>
+      <p:sp>
+        <p:nvSpPr>
+          <p:cNvPr id="5" name="TextBox 4"/>
+          <p:cNvSpPr txBox="1"/>
+          <p:nvPr/>
+        </p:nvSpPr>
+        <p:spPr>
+          <a:xfrm>
+            <a:off x="475488" y="475488"/>
+            <a:ext cx="2027872" cy="310896"/>
+          </a:xfrm>
+          <a:prstGeom prst="rect">
+            <a:avLst/>
+          </a:prstGeom>
+          <a:noFill/>
+        </p:spPr>
+        <p:txBody>
+          <a:bodyPr wrap="square" anchor="ctr" lIns="0" rIns="0" tIns="0" bIns="0">
+            <a:spAutoFit/>
+          </a:bodyPr>
+          <a:lstStyle/>
+          <a:p>
+            <a:pPr algn="ctr">
+              <a:lnSpc>
+                <a:spcPct val="114000"/>
+              </a:lnSpc>
+            </a:pPr>
+            <a:r>
+              <a:rPr sz="1050" b="1">
+                <a:solidFill>
+                  <a:srgbClr val="FFFFFF"/>
+                </a:solidFill>
+              </a:rPr>
+              <a:t>SCREENSHOT · 终端逐字截图</a:t>
+            </a:r>
+          </a:p>
+        </p:txBody>
+      </p:sp>
+      <p:sp>
+        <p:nvSpPr>
+          <p:cNvPr id="6" name="TextBox 5"/>
+          <p:cNvSpPr txBox="1"/>
+          <p:nvPr/>
+        </p:nvSpPr>
+        <p:spPr>
+          <a:xfrm>
+            <a:off x="475488" y="859536"/>
+            <a:ext cx="11237976" cy="502920"/>
+          </a:xfrm>
+          <a:prstGeom prst="rect">
+            <a:avLst/>
+          </a:prstGeom>
+          <a:noFill/>
+        </p:spPr>
+        <p:txBody>
+          <a:bodyPr wrap="square" anchor="t" lIns="0" rIns="0" tIns="0" bIns="0">
+            <a:spAutoFit/>
+          </a:bodyPr>
+          <a:lstStyle/>
+          <a:p>
+            <a:pPr algn="l">
+              <a:lnSpc>
+                <a:spcPct val="114000"/>
+              </a:lnSpc>
+            </a:pPr>
+            <a:r>
+              <a:rPr sz="2200" b="1">
+                <a:solidFill>
+                  <a:srgbClr val="1B2B28"/>
+                </a:solidFill>
+              </a:rPr>
+              <a:t>P3.1/P3.2 · 测试全绿证据＋pytest 全量实跑</a:t>
+            </a:r>
+          </a:p>
+        </p:txBody>
+      </p:sp>
+      <p:sp>
+        <p:nvSpPr>
+          <p:cNvPr id="7" name="Rounded Rectangle 6"/>
+          <p:cNvSpPr/>
+          <p:nvPr/>
+        </p:nvSpPr>
+        <p:spPr>
+          <a:xfrm>
+            <a:off x="475488" y="1389888"/>
+            <a:ext cx="1234440" cy="27432"/>
+          </a:xfrm>
+          <a:prstGeom prst="roundRect">
+            <a:avLst>
+              <a:gd name="adj" fmla="val 50000"/>
+            </a:avLst>
+          </a:prstGeom>
+          <a:solidFill>
+            <a:srgbClr val="C9A227"/>
+          </a:solidFill>
+          <a:ln>
+            <a:noFill/>
+          </a:ln>
+          <a:effectLst/>
+        </p:spPr>
+        <p:style>
+          <a:lnRef idx="1">
+            <a:schemeClr val="accent1"/>
+          </a:lnRef>
+          <a:fillRef idx="3">
+            <a:schemeClr val="accent1"/>
+          </a:fillRef>
+          <a:effectRef idx="2">
+            <a:schemeClr val="accent1"/>
+          </a:effectRef>
+          <a:fontRef idx="minor">
+            <a:schemeClr val="lt1"/>
+          </a:fontRef>
+        </p:style>
+        <p:txBody>
+          <a:bodyPr rtlCol="0" anchor="ctr"/>
+          <a:lstStyle/>
+          <a:p>
+            <a:pPr algn="ctr"/>
+          </a:p>
+        </p:txBody>
+      </p:sp>
+      <p:sp>
+        <p:nvSpPr>
+          <p:cNvPr id="8" name="Rounded Rectangle 7"/>
+          <p:cNvSpPr/>
+          <p:nvPr/>
+        </p:nvSpPr>
+        <p:spPr>
+          <a:xfrm>
+            <a:off x="475488" y="6419088"/>
+            <a:ext cx="11237976" cy="10972"/>
+          </a:xfrm>
+          <a:prstGeom prst="roundRect">
+            <a:avLst>
+              <a:gd name="adj" fmla="val 50000"/>
+            </a:avLst>
+          </a:prstGeom>
+          <a:solidFill>
+            <a:srgbClr val="E4F1EE"/>
+          </a:solidFill>
+          <a:ln>
+            <a:noFill/>
+          </a:ln>
+          <a:effectLst/>
+        </p:spPr>
+        <p:style>
+          <a:lnRef idx="1">
+            <a:schemeClr val="accent1"/>
+          </a:lnRef>
+          <a:fillRef idx="3">
+            <a:schemeClr val="accent1"/>
+          </a:fillRef>
+          <a:effectRef idx="2">
+            <a:schemeClr val="accent1"/>
+          </a:effectRef>
+          <a:fontRef idx="minor">
+            <a:schemeClr val="lt1"/>
+          </a:fontRef>
+        </p:style>
+        <p:txBody>
+          <a:bodyPr rtlCol="0" anchor="ctr"/>
+          <a:lstStyle/>
+          <a:p>
+            <a:pPr algn="ctr"/>
+          </a:p>
+        </p:txBody>
+      </p:sp>
+      <p:sp>
+        <p:nvSpPr>
+          <p:cNvPr id="9" name="TextBox 8"/>
+          <p:cNvSpPr txBox="1"/>
+          <p:nvPr/>
+        </p:nvSpPr>
+        <p:spPr>
+          <a:xfrm>
+            <a:off x="475488" y="6455664"/>
+            <a:ext cx="7315200" cy="292608"/>
+          </a:xfrm>
+          <a:prstGeom prst="rect">
+            <a:avLst/>
+          </a:prstGeom>
+          <a:noFill/>
+        </p:spPr>
+        <p:txBody>
+          <a:bodyPr wrap="square" anchor="t" lIns="0" rIns="0" tIns="0" bIns="0">
+            <a:spAutoFit/>
+          </a:bodyPr>
+          <a:lstStyle/>
+          <a:p>
+            <a:pPr algn="l">
+              <a:lnSpc>
+                <a:spcPct val="114000"/>
+              </a:lnSpc>
+            </a:pPr>
+            <a:r>
+              <a:rPr sz="900" b="0">
+                <a:solidFill>
+                  <a:srgbClr val="5C6E6A"/>
+                </a:solidFill>
+              </a:rPr>
+              <a:t>两江智造集团 · Python程序设计（项目实战）</a:t>
+            </a:r>
+          </a:p>
+        </p:txBody>
+      </p:sp>
+      <p:sp>
+        <p:nvSpPr>
+          <p:cNvPr id="10" name="TextBox 9"/>
+          <p:cNvSpPr txBox="1"/>
+          <p:nvPr/>
+        </p:nvSpPr>
+        <p:spPr>
+          <a:xfrm>
+            <a:off x="10597896" y="6537960"/>
+            <a:ext cx="996696" cy="301752"/>
+          </a:xfrm>
+          <a:prstGeom prst="rect">
+            <a:avLst/>
+          </a:prstGeom>
+          <a:noFill/>
+        </p:spPr>
+        <p:txBody>
+          <a:bodyPr wrap="square" anchor="t" lIns="0" rIns="0" tIns="0" bIns="0">
+            <a:spAutoFit/>
+          </a:bodyPr>
+          <a:lstStyle/>
+          <a:p>
+            <a:pPr algn="r">
+              <a:lnSpc>
+                <a:spcPct val="114000"/>
+              </a:lnSpc>
+            </a:pPr>
+            <a:r>
+              <a:rPr sz="1000" b="0">
+                <a:solidFill>
+                  <a:srgbClr val="8A97B5"/>
+                </a:solidFill>
+              </a:rPr>
+              <a:t>50 / 65</a:t>
+            </a:r>
+          </a:p>
+        </p:txBody>
+      </p:sp>
+      <p:sp>
+        <p:nvSpPr>
+          <p:cNvPr id="11" name="TextBox 10"/>
+          <p:cNvSpPr txBox="1"/>
+          <p:nvPr/>
+        </p:nvSpPr>
+        <p:spPr>
+          <a:xfrm>
+            <a:off x="475488" y="1517904"/>
+            <a:ext cx="11237976" cy="237744"/>
+          </a:xfrm>
+          <a:prstGeom prst="rect">
+            <a:avLst/>
+          </a:prstGeom>
+          <a:noFill/>
+        </p:spPr>
+        <p:txBody>
+          <a:bodyPr wrap="square" anchor="t" lIns="0" rIns="0" tIns="0" bIns="0">
+            <a:spAutoFit/>
+          </a:bodyPr>
+          <a:lstStyle/>
+          <a:p>
+            <a:pPr algn="l">
+              <a:lnSpc>
+                <a:spcPct val="114000"/>
+              </a:lnSpc>
+            </a:pPr>
+            <a:r>
+              <a:rPr sz="1000" b="0">
+                <a:solidFill>
+                  <a:srgbClr val="5C6E6A"/>
+                </a:solidFill>
+              </a:rPr>
+              <a:t>pytest 全量实跑：本机真实运行输出，非示例、非节选</a:t>
+            </a:r>
+          </a:p>
+        </p:txBody>
+      </p:sp>
+      <p:pic>
+        <p:nvPicPr>
+          <p:cNvPr id="12" name="Picture 11" descr="p33_kpi_cockpit_pytest.png"/>
+          <p:cNvPicPr>
+            <a:picLocks noChangeAspect="1"/>
+          </p:cNvPicPr>
+          <p:nvPr/>
+        </p:nvPicPr>
+        <p:blipFill>
+          <a:blip r:embed="rId2"/>
+          <a:stretch>
+            <a:fillRect/>
+          </a:stretch>
+        </p:blipFill>
+        <p:spPr>
+          <a:xfrm>
+            <a:off x="475488" y="2265275"/>
+            <a:ext cx="11237976" cy="1989122"/>
+          </a:xfrm>
+          <a:prstGeom prst="rect">
+            <a:avLst/>
+          </a:prstGeom>
+        </p:spPr>
+      </p:pic>
+      <p:sp>
+        <p:nvSpPr>
+          <p:cNvPr id="13" name="TextBox 12"/>
+          <p:cNvSpPr txBox="1"/>
+          <p:nvPr/>
+        </p:nvSpPr>
+        <p:spPr>
+          <a:xfrm>
+            <a:off x="475488" y="4290972"/>
+            <a:ext cx="11237976" cy="256032"/>
+          </a:xfrm>
+          <a:prstGeom prst="rect">
+            <a:avLst/>
+          </a:prstGeom>
+          <a:noFill/>
+        </p:spPr>
+        <p:txBody>
+          <a:bodyPr wrap="square" anchor="t" lIns="0" rIns="0" tIns="0" bIns="0">
+            <a:spAutoFit/>
+          </a:bodyPr>
+          <a:lstStyle/>
+          <a:p>
+            <a:pPr algn="l">
+              <a:lnSpc>
+                <a:spcPct val="114000"/>
+              </a:lnSpc>
+            </a:pPr>
+            <a:r>
+              <a:rPr sz="850" b="0">
+                <a:solidFill>
+                  <a:srgbClr val="5C6E6A"/>
+                </a:solidFill>
+              </a:rPr>
+              <a:t>▲ pytest：270 passed in 18.75s（本机实跑，非示例）</a:t>
+            </a:r>
+          </a:p>
+        </p:txBody>
+      </p:sp>
+      <p:sp>
+        <p:nvSpPr>
+          <p:cNvPr id="14" name="Rounded Rectangle 13"/>
+          <p:cNvSpPr/>
+          <p:nvPr/>
+        </p:nvSpPr>
+        <p:spPr>
+          <a:xfrm>
+            <a:off x="475488" y="4656732"/>
+            <a:ext cx="11237976" cy="822960"/>
+          </a:xfrm>
+          <a:prstGeom prst="roundRect">
+            <a:avLst>
+              <a:gd name="adj" fmla="val 5000"/>
+            </a:avLst>
+          </a:prstGeom>
+          <a:solidFill>
+            <a:srgbClr val="E4F1EE"/>
+          </a:solidFill>
+          <a:ln>
+            <a:noFill/>
+          </a:ln>
+          <a:effectLst/>
+        </p:spPr>
+        <p:style>
+          <a:lnRef idx="1">
+            <a:schemeClr val="accent1"/>
+          </a:lnRef>
+          <a:fillRef idx="3">
+            <a:schemeClr val="accent1"/>
+          </a:fillRef>
+          <a:effectRef idx="2">
+            <a:schemeClr val="accent1"/>
+          </a:effectRef>
+          <a:fontRef idx="minor">
+            <a:schemeClr val="lt1"/>
+          </a:fontRef>
+        </p:style>
+        <p:txBody>
+          <a:bodyPr rtlCol="0" anchor="ctr"/>
+          <a:lstStyle/>
+          <a:p>
+            <a:pPr algn="ctr"/>
+          </a:p>
+        </p:txBody>
+      </p:sp>
+      <p:sp>
+        <p:nvSpPr>
+          <p:cNvPr id="15" name="Rounded Rectangle 14"/>
+          <p:cNvSpPr/>
+          <p:nvPr/>
+        </p:nvSpPr>
+        <p:spPr>
+          <a:xfrm>
+            <a:off x="475488" y="4656732"/>
+            <a:ext cx="54864" cy="822960"/>
+          </a:xfrm>
+          <a:prstGeom prst="roundRect">
+            <a:avLst>
+              <a:gd name="adj" fmla="val 50000"/>
+            </a:avLst>
+          </a:prstGeom>
+          <a:solidFill>
+            <a:srgbClr val="C9A227"/>
+          </a:solidFill>
+          <a:ln>
+            <a:noFill/>
+          </a:ln>
+          <a:effectLst/>
+        </p:spPr>
+        <p:style>
+          <a:lnRef idx="1">
+            <a:schemeClr val="accent1"/>
+          </a:lnRef>
+          <a:fillRef idx="3">
+            <a:schemeClr val="accent1"/>
+          </a:fillRef>
+          <a:effectRef idx="2">
+            <a:schemeClr val="accent1"/>
+          </a:effectRef>
+          <a:fontRef idx="minor">
+            <a:schemeClr val="lt1"/>
+          </a:fontRef>
+        </p:style>
+        <p:txBody>
+          <a:bodyPr rtlCol="0" anchor="ctr"/>
+          <a:lstStyle/>
+          <a:p>
+            <a:pPr algn="ctr"/>
+          </a:p>
+        </p:txBody>
+      </p:sp>
+      <p:sp>
+        <p:nvSpPr>
+          <p:cNvPr id="16" name="TextBox 15"/>
+          <p:cNvSpPr txBox="1"/>
+          <p:nvPr/>
+        </p:nvSpPr>
+        <p:spPr>
+          <a:xfrm>
+            <a:off x="676656" y="4739028"/>
+            <a:ext cx="10908792" cy="658368"/>
+          </a:xfrm>
+          <a:prstGeom prst="rect">
+            <a:avLst/>
+          </a:prstGeom>
+          <a:noFill/>
+        </p:spPr>
+        <p:txBody>
+          <a:bodyPr wrap="square" anchor="t" lIns="0" rIns="0" tIns="0" bIns="0">
+            <a:spAutoFit/>
+          </a:bodyPr>
+          <a:lstStyle/>
+          <a:p>
+            <a:pPr algn="l">
+              <a:lnSpc>
+                <a:spcPct val="126000"/>
+              </a:lnSpc>
+            </a:pPr>
+            <a:r>
+              <a:rPr sz="850" b="0">
+                <a:solidFill>
+                  <a:srgbClr val="1B2B28"/>
+                </a:solidFill>
+              </a:rPr>
+              <a:t>本项目四档只有一套阶梯口径（课堂 D/C/B/A 即工单及格/良好/优秀/超优），逐字实测见上一页截图；本页补的是测试全绿证据。</a:t>
+            </a:r>
+          </a:p>
+          <a:p>
+            <a:pPr algn="l">
+              <a:lnSpc>
+                <a:spcPct val="126000"/>
+              </a:lnSpc>
+            </a:pPr>
+            <a:r>
+              <a:rPr sz="850" b="0">
+                <a:solidFill>
+                  <a:srgbClr val="1B2B28"/>
+                </a:solidFill>
+              </a:rPr>
+              <a:t>复现：cd 工程化项目/p33_kpi_cockpit &amp;&amp; python -m pytest -q -o addopts=''</a:t>
+            </a:r>
+          </a:p>
+          <a:p>
+            <a:pPr algn="l">
+              <a:lnSpc>
+                <a:spcPct val="126000"/>
+              </a:lnSpc>
+            </a:pPr>
+            <a:r>
+              <a:rPr sz="850" b="0">
+                <a:solidFill>
+                  <a:srgbClr val="1B2B28"/>
+                </a:solidFill>
+              </a:rPr>
+              <a:t>工单提交：截图需含终端标题栏的文件名与完整输出，退出码 0 才算全绿。</a:t>
+            </a:r>
+          </a:p>
+        </p:txBody>
+      </p:sp>
+    </p:spTree>
+  </p:cSld>
+  <p:clrMapOvr>
+    <a:masterClrMapping/>
+  </p:clrMapOvr>
+</p:sld>
+</file>
+
 <file path=ppt/slides/slide7.xml><?xml version="1.0" encoding="utf-8"?>
 <p:sld xmlns:a="http://schemas.openxmlformats.org/drawingml/2006/main" xmlns:p="http://schemas.openxmlformats.org/presentationml/2006/main" xmlns:r="http://schemas.openxmlformats.org/officeDocument/2006/relationships">
   <p:cSld>
@@ -59281,7 +62396,7 @@
                 </a:solidFill>
                 <a:latin typeface="微软雅黑"/>
               </a:rPr>
-              <a:t>7 / 62</a:t>
+              <a:t>7 / 65</a:t>
             </a:r>
           </a:p>
         </p:txBody>
@@ -60136,7 +63251,7 @@
                 </a:solidFill>
                 <a:latin typeface="微软雅黑"/>
               </a:rPr>
-              <a:t>8 / 62</a:t>
+              <a:t>8 / 65</a:t>
             </a:r>
           </a:p>
         </p:txBody>
@@ -61738,7 +64853,7 @@
                 </a:solidFill>
                 <a:latin typeface="微软雅黑"/>
               </a:rPr>
-              <a:t>9 / 62</a:t>
+              <a:t>9 / 65</a:t>
             </a:r>
           </a:p>
         </p:txBody>
